--- a/public/lessons/year-6-maths/summer/week-28/calculate-the-mean/teaching-powerpoint-v1.pptx
+++ b/public/lessons/year-6-maths/summer/week-28/calculate-the-mean/teaching-powerpoint-v1.pptx
@@ -2,24 +2,24 @@
 <file path=ppt/presentation.xml><?xml version="1.0" encoding="utf-8"?>
 <p:presentation xmlns:p="http://schemas.openxmlformats.org/presentationml/2006/main">
   <p:sldMasterIdLst>
-    <p:sldMasterId xmlns:r="http://schemas.openxmlformats.org/officeDocument/2006/relationships" id="2147483648" r:id="R79aff6620c8f4002"/>
+    <p:sldMasterId xmlns:r="http://schemas.openxmlformats.org/officeDocument/2006/relationships" id="2147483648" r:id="R04a729fb77204096"/>
   </p:sldMasterIdLst>
   <p:notesMasterIdLst>
-    <p:notesMasterId xmlns:r="http://schemas.openxmlformats.org/officeDocument/2006/relationships" r:id="R27e637b9881243c0"/>
+    <p:notesMasterId xmlns:r="http://schemas.openxmlformats.org/officeDocument/2006/relationships" r:id="Rb8b6529af5744f0e"/>
   </p:notesMasterIdLst>
   <p:sldIdLst>
-    <p:sldId xmlns:r="http://schemas.openxmlformats.org/officeDocument/2006/relationships" id="256" r:id="R1f5190a0176543ec"/>
-    <p:sldId xmlns:r="http://schemas.openxmlformats.org/officeDocument/2006/relationships" id="257" r:id="Rce83e7bc8e7b4b43"/>
-    <p:sldId xmlns:r="http://schemas.openxmlformats.org/officeDocument/2006/relationships" id="258" r:id="R060d630d2f2f4121"/>
-    <p:sldId xmlns:r="http://schemas.openxmlformats.org/officeDocument/2006/relationships" id="259" r:id="R504a09f4c96a4e94"/>
-    <p:sldId xmlns:r="http://schemas.openxmlformats.org/officeDocument/2006/relationships" id="260" r:id="R4dfd69d6aa4e4f48"/>
-    <p:sldId xmlns:r="http://schemas.openxmlformats.org/officeDocument/2006/relationships" id="261" r:id="R326fbdf376134075"/>
-    <p:sldId xmlns:r="http://schemas.openxmlformats.org/officeDocument/2006/relationships" id="262" r:id="R5f37454619e74de1"/>
-    <p:sldId xmlns:r="http://schemas.openxmlformats.org/officeDocument/2006/relationships" id="263" r:id="R89a0de0128844469"/>
-    <p:sldId xmlns:r="http://schemas.openxmlformats.org/officeDocument/2006/relationships" id="264" r:id="R7054a9a81789404c"/>
-    <p:sldId xmlns:r="http://schemas.openxmlformats.org/officeDocument/2006/relationships" id="265" r:id="Re8914faa55a8498b"/>
-    <p:sldId xmlns:r="http://schemas.openxmlformats.org/officeDocument/2006/relationships" id="266" r:id="R6dba0c1561f6436c"/>
-    <p:sldId xmlns:r="http://schemas.openxmlformats.org/officeDocument/2006/relationships" id="267" r:id="R1bf8ad631e5b442c"/>
+    <p:sldId xmlns:r="http://schemas.openxmlformats.org/officeDocument/2006/relationships" id="256" r:id="Rd0de6b1923f44b19"/>
+    <p:sldId xmlns:r="http://schemas.openxmlformats.org/officeDocument/2006/relationships" id="257" r:id="R66f4cf7ab45e494a"/>
+    <p:sldId xmlns:r="http://schemas.openxmlformats.org/officeDocument/2006/relationships" id="258" r:id="R2af01d0d43f54bb2"/>
+    <p:sldId xmlns:r="http://schemas.openxmlformats.org/officeDocument/2006/relationships" id="259" r:id="R34eb6ab4cca14d17"/>
+    <p:sldId xmlns:r="http://schemas.openxmlformats.org/officeDocument/2006/relationships" id="260" r:id="R5befa0258e874d36"/>
+    <p:sldId xmlns:r="http://schemas.openxmlformats.org/officeDocument/2006/relationships" id="261" r:id="R74c6cd0781bf4aa1"/>
+    <p:sldId xmlns:r="http://schemas.openxmlformats.org/officeDocument/2006/relationships" id="262" r:id="Ra252230e3c264100"/>
+    <p:sldId xmlns:r="http://schemas.openxmlformats.org/officeDocument/2006/relationships" id="263" r:id="R04735dfec7194c0d"/>
+    <p:sldId xmlns:r="http://schemas.openxmlformats.org/officeDocument/2006/relationships" id="264" r:id="R52a8f6700a4141b3"/>
+    <p:sldId xmlns:r="http://schemas.openxmlformats.org/officeDocument/2006/relationships" id="265" r:id="R86516cc869cc4cd9"/>
+    <p:sldId xmlns:r="http://schemas.openxmlformats.org/officeDocument/2006/relationships" id="266" r:id="R15d5339cacb74c3c"/>
+    <p:sldId xmlns:r="http://schemas.openxmlformats.org/officeDocument/2006/relationships" id="267" r:id="R1f2ca4840a9e4f86"/>
   </p:sldIdLst>
   <p:sldSz cx="12192000" cy="6858000"/>
   <p:notesSz cx="6858000" cy="9144000"/>
@@ -873,7 +873,7 @@
           <a:lstStyle xmlns:a="http://schemas.openxmlformats.org/drawingml/2006/main"/>
           <a:p xmlns:a="http://schemas.openxmlformats.org/drawingml/2006/main">
             <a:r>
-              <a:t>I do. Reveal the question, setup and each calculation stage one click at a time. Pupils watch before copying. Model answer: 15.</a:t>
+              <a:t>I do. Reveal the question, then reveal each mathematical change one click at a time. Point to the numbers and operation that changed before moving to the next line. Final answer: 15.</a:t>
             </a:r>
           </a:p>
         </p:txBody>
@@ -1291,7 +1291,7 @@
   </p:cSld>
   <p:clrMap bg1="lt1" tx1="dk1" bg2="lt2" tx2="dk2" accent1="accent1" accent2="accent2" accent3="accent3" accent4="accent4" accent5="accent5" accent6="accent6" hlink="hlink" folHlink="folHlink"/>
   <p:sldLayoutIdLst>
-    <p:sldLayoutId xmlns:r="http://schemas.openxmlformats.org/officeDocument/2006/relationships" id="2147483649" r:id="R350aaf6840c9465d"/>
+    <p:sldLayoutId xmlns:r="http://schemas.openxmlformats.org/officeDocument/2006/relationships" id="2147483649" r:id="R04dee4026f664d3a"/>
   </p:sldLayoutIdLst>
   <p:txStyles>
     <p:titleStyle>
@@ -1842,7 +1842,7 @@
           <p:cNvPr id="12" name="">
             <a:extLst xmlns:a="http://schemas.openxmlformats.org/drawingml/2006/main">
               <a:ext uri="{FF2B5EF4-FFF2-40B4-BE49-F238E27FC236}">
-                <a16:creationId xmlns:a16="http://schemas.microsoft.com/office/drawing/2014/main" id="{F8355715-BC11-4DA0-A8F4-5ABAF94A48A8}"/>
+                <a16:creationId xmlns:a16="http://schemas.microsoft.com/office/drawing/2014/main" id="{A0361833-BFBE-4371-A999-350D5B3DB28A}"/>
               </a:ext>
             </a:extLst>
           </p:cNvPr>
@@ -1874,7 +1874,7 @@
           <p:cNvPr id="2" name="">
             <a:extLst xmlns:a="http://schemas.openxmlformats.org/drawingml/2006/main">
               <a:ext uri="{FF2B5EF4-FFF2-40B4-BE49-F238E27FC236}">
-                <a16:creationId xmlns:a16="http://schemas.microsoft.com/office/drawing/2014/main" id="{8C3903A9-F2B7-420B-A423-B82B89E6620C}"/>
+                <a16:creationId xmlns:a16="http://schemas.microsoft.com/office/drawing/2014/main" id="{CA0E596D-AD66-446F-91FA-A2D231DEC77E}"/>
               </a:ext>
             </a:extLst>
           </p:cNvPr>
@@ -1931,7 +1931,7 @@
           <p:cNvPr id="3" name="">
             <a:extLst xmlns:a="http://schemas.openxmlformats.org/drawingml/2006/main">
               <a:ext uri="{FF2B5EF4-FFF2-40B4-BE49-F238E27FC236}">
-                <a16:creationId xmlns:a16="http://schemas.microsoft.com/office/drawing/2014/main" id="{E8119ADD-B3B7-4BCE-8538-22D81104EA2E}"/>
+                <a16:creationId xmlns:a16="http://schemas.microsoft.com/office/drawing/2014/main" id="{6577F302-F9F1-48D4-85A6-5F886BFD9F60}"/>
               </a:ext>
             </a:extLst>
           </p:cNvPr>
@@ -1965,7 +1965,7 @@
           <p:cNvPr id="4" name="">
             <a:extLst xmlns:a="http://schemas.openxmlformats.org/drawingml/2006/main">
               <a:ext uri="{FF2B5EF4-FFF2-40B4-BE49-F238E27FC236}">
-                <a16:creationId xmlns:a16="http://schemas.microsoft.com/office/drawing/2014/main" id="{7FDF3D1A-6A16-4488-A9F0-B50D7200D7BA}"/>
+                <a16:creationId xmlns:a16="http://schemas.microsoft.com/office/drawing/2014/main" id="{AE6EFD87-52A1-4CAA-BC8A-32B96F39A751}"/>
               </a:ext>
             </a:extLst>
           </p:cNvPr>
@@ -2022,7 +2022,7 @@
           <p:cNvPr id="5" name="">
             <a:extLst xmlns:a="http://schemas.openxmlformats.org/drawingml/2006/main">
               <a:ext uri="{FF2B5EF4-FFF2-40B4-BE49-F238E27FC236}">
-                <a16:creationId xmlns:a16="http://schemas.microsoft.com/office/drawing/2014/main" id="{D54FA611-D85C-4841-928B-7070EB21F711}"/>
+                <a16:creationId xmlns:a16="http://schemas.microsoft.com/office/drawing/2014/main" id="{85385987-6A9C-4B3F-9376-3F5D3927E8E5}"/>
               </a:ext>
             </a:extLst>
           </p:cNvPr>
@@ -2079,7 +2079,7 @@
           <p:cNvPr id="6" name="">
             <a:extLst xmlns:a="http://schemas.openxmlformats.org/drawingml/2006/main">
               <a:ext uri="{FF2B5EF4-FFF2-40B4-BE49-F238E27FC236}">
-                <a16:creationId xmlns:a16="http://schemas.microsoft.com/office/drawing/2014/main" id="{491AF3F9-00C1-4FB3-AFD7-AA72D37B6163}"/>
+                <a16:creationId xmlns:a16="http://schemas.microsoft.com/office/drawing/2014/main" id="{0C991F0A-0459-4603-9D96-77AA32B5C011}"/>
               </a:ext>
             </a:extLst>
           </p:cNvPr>
@@ -2113,7 +2113,7 @@
           <p:cNvPr id="7" name="">
             <a:extLst xmlns:a="http://schemas.openxmlformats.org/drawingml/2006/main">
               <a:ext uri="{FF2B5EF4-FFF2-40B4-BE49-F238E27FC236}">
-                <a16:creationId xmlns:a16="http://schemas.microsoft.com/office/drawing/2014/main" id="{5A8E94E1-ECE5-41E7-A469-DAA0D2823358}"/>
+                <a16:creationId xmlns:a16="http://schemas.microsoft.com/office/drawing/2014/main" id="{8F470F5F-A281-4568-998B-1E6BBDBD27A6}"/>
               </a:ext>
             </a:extLst>
           </p:cNvPr>
@@ -2170,7 +2170,7 @@
           <p:cNvPr id="8" name="">
             <a:extLst xmlns:a="http://schemas.openxmlformats.org/drawingml/2006/main">
               <a:ext uri="{FF2B5EF4-FFF2-40B4-BE49-F238E27FC236}">
-                <a16:creationId xmlns:a16="http://schemas.microsoft.com/office/drawing/2014/main" id="{1E8BC1DE-E598-4A68-BCC8-C2F3485D8A34}"/>
+                <a16:creationId xmlns:a16="http://schemas.microsoft.com/office/drawing/2014/main" id="{68BBF43D-1950-4861-AF8B-E3D787202F58}"/>
               </a:ext>
             </a:extLst>
           </p:cNvPr>
@@ -2227,7 +2227,7 @@
           <p:cNvPr id="9" name="">
             <a:extLst xmlns:a="http://schemas.openxmlformats.org/drawingml/2006/main">
               <a:ext uri="{FF2B5EF4-FFF2-40B4-BE49-F238E27FC236}">
-                <a16:creationId xmlns:a16="http://schemas.microsoft.com/office/drawing/2014/main" id="{A2DA181D-617B-4D05-B9CF-471603CD7619}"/>
+                <a16:creationId xmlns:a16="http://schemas.microsoft.com/office/drawing/2014/main" id="{CB842BFE-5046-48B1-8F76-5486D59A061F}"/>
               </a:ext>
             </a:extLst>
           </p:cNvPr>
@@ -2284,7 +2284,7 @@
           <p:cNvPr id="10" name="">
             <a:extLst xmlns:a="http://schemas.openxmlformats.org/drawingml/2006/main">
               <a:ext uri="{FF2B5EF4-FFF2-40B4-BE49-F238E27FC236}">
-                <a16:creationId xmlns:a16="http://schemas.microsoft.com/office/drawing/2014/main" id="{411A9604-1D9C-4203-9BF7-9CC1935F2230}"/>
+                <a16:creationId xmlns:a16="http://schemas.microsoft.com/office/drawing/2014/main" id="{C29E50E8-55C6-45C6-8D62-47BA1C3FA271}"/>
               </a:ext>
             </a:extLst>
           </p:cNvPr>
@@ -2341,7 +2341,7 @@
           <p:cNvPr id="11" name="">
             <a:extLst xmlns:a="http://schemas.openxmlformats.org/drawingml/2006/main">
               <a:ext uri="{FF2B5EF4-FFF2-40B4-BE49-F238E27FC236}">
-                <a16:creationId xmlns:a16="http://schemas.microsoft.com/office/drawing/2014/main" id="{E57E8270-B7BD-4102-B921-B25252958811}"/>
+                <a16:creationId xmlns:a16="http://schemas.microsoft.com/office/drawing/2014/main" id="{0A006502-D427-4760-A3AB-02385B7B718A}"/>
               </a:ext>
             </a:extLst>
           </p:cNvPr>
@@ -2396,7 +2396,7 @@
     </p:spTree>
     <p:extLst>
       <p:ext uri="{BB962C8B-B14F-4D97-AF65-F5344CB8AC3E}">
-        <p14:creationId xmlns:p14="http://schemas.microsoft.com/office/powerpoint/2010/main" val="1313593265"/>
+        <p14:creationId xmlns:p14="http://schemas.microsoft.com/office/powerpoint/2010/main" val="1501738043"/>
       </p:ext>
     </p:extLst>
   </p:cSld>
@@ -2427,7 +2427,7 @@
           <p:cNvPr id="14" name="">
             <a:extLst xmlns:a="http://schemas.openxmlformats.org/drawingml/2006/main">
               <a:ext uri="{FF2B5EF4-FFF2-40B4-BE49-F238E27FC236}">
-                <a16:creationId xmlns:a16="http://schemas.microsoft.com/office/drawing/2014/main" id="{B4022D6E-0705-4E4A-B341-E84B830AB077}"/>
+                <a16:creationId xmlns:a16="http://schemas.microsoft.com/office/drawing/2014/main" id="{F0946292-573F-4EF2-901D-4FAABE560F56}"/>
               </a:ext>
             </a:extLst>
           </p:cNvPr>
@@ -2459,7 +2459,7 @@
           <p:cNvPr id="2" name="">
             <a:extLst xmlns:a="http://schemas.openxmlformats.org/drawingml/2006/main">
               <a:ext uri="{FF2B5EF4-FFF2-40B4-BE49-F238E27FC236}">
-                <a16:creationId xmlns:a16="http://schemas.microsoft.com/office/drawing/2014/main" id="{C4D6C296-E86F-4BE7-9CEB-39F024390F07}"/>
+                <a16:creationId xmlns:a16="http://schemas.microsoft.com/office/drawing/2014/main" id="{AE6EFE55-5DFC-473E-9EEF-0CB8666A734B}"/>
               </a:ext>
             </a:extLst>
           </p:cNvPr>
@@ -2516,7 +2516,7 @@
           <p:cNvPr id="3" name="">
             <a:extLst xmlns:a="http://schemas.openxmlformats.org/drawingml/2006/main">
               <a:ext uri="{FF2B5EF4-FFF2-40B4-BE49-F238E27FC236}">
-                <a16:creationId xmlns:a16="http://schemas.microsoft.com/office/drawing/2014/main" id="{68165F5B-1BDB-47B0-B7E1-4D4B2FFC2769}"/>
+                <a16:creationId xmlns:a16="http://schemas.microsoft.com/office/drawing/2014/main" id="{B5EFA306-8A4F-4B19-B994-28B97DE88C0F}"/>
               </a:ext>
             </a:extLst>
           </p:cNvPr>
@@ -2548,7 +2548,7 @@
           <p:cNvPr id="4" name="">
             <a:extLst xmlns:a="http://schemas.openxmlformats.org/drawingml/2006/main">
               <a:ext uri="{FF2B5EF4-FFF2-40B4-BE49-F238E27FC236}">
-                <a16:creationId xmlns:a16="http://schemas.microsoft.com/office/drawing/2014/main" id="{A7585569-B23F-4913-82D8-696C4E13C5DA}"/>
+                <a16:creationId xmlns:a16="http://schemas.microsoft.com/office/drawing/2014/main" id="{D20781E8-0EF8-41C4-A5B3-038E701A7426}"/>
               </a:ext>
             </a:extLst>
           </p:cNvPr>
@@ -2605,7 +2605,7 @@
           <p:cNvPr id="5" name="">
             <a:extLst xmlns:a="http://schemas.openxmlformats.org/drawingml/2006/main">
               <a:ext uri="{FF2B5EF4-FFF2-40B4-BE49-F238E27FC236}">
-                <a16:creationId xmlns:a16="http://schemas.microsoft.com/office/drawing/2014/main" id="{CA886D12-2289-4597-B9D3-FF6AE06435F9}"/>
+                <a16:creationId xmlns:a16="http://schemas.microsoft.com/office/drawing/2014/main" id="{C342190E-23CE-4391-9FD0-83587C4EEE9A}"/>
               </a:ext>
             </a:extLst>
           </p:cNvPr>
@@ -2662,7 +2662,7 @@
           <p:cNvPr id="6" name="">
             <a:extLst xmlns:a="http://schemas.openxmlformats.org/drawingml/2006/main">
               <a:ext uri="{FF2B5EF4-FFF2-40B4-BE49-F238E27FC236}">
-                <a16:creationId xmlns:a16="http://schemas.microsoft.com/office/drawing/2014/main" id="{4C1FF1BB-FB48-4955-8F60-7CD20CE95B14}"/>
+                <a16:creationId xmlns:a16="http://schemas.microsoft.com/office/drawing/2014/main" id="{02A68B8E-9F68-4198-94C1-E98C1ACAA8E1}"/>
               </a:ext>
             </a:extLst>
           </p:cNvPr>
@@ -2719,7 +2719,7 @@
           <p:cNvPr id="7" name="">
             <a:extLst xmlns:a="http://schemas.openxmlformats.org/drawingml/2006/main">
               <a:ext uri="{FF2B5EF4-FFF2-40B4-BE49-F238E27FC236}">
-                <a16:creationId xmlns:a16="http://schemas.microsoft.com/office/drawing/2014/main" id="{BEEA0A0E-5E2E-4F4E-BF87-F696F0BEA32F}"/>
+                <a16:creationId xmlns:a16="http://schemas.microsoft.com/office/drawing/2014/main" id="{9A53FC40-4A63-4B2E-A03F-73A4C6A949FE}"/>
               </a:ext>
             </a:extLst>
           </p:cNvPr>
@@ -2751,7 +2751,7 @@
           <p:cNvPr id="8" name="">
             <a:extLst xmlns:a="http://schemas.openxmlformats.org/drawingml/2006/main">
               <a:ext uri="{FF2B5EF4-FFF2-40B4-BE49-F238E27FC236}">
-                <a16:creationId xmlns:a16="http://schemas.microsoft.com/office/drawing/2014/main" id="{F166A67A-040F-4FEB-82D0-6CB43DDF1CC0}"/>
+                <a16:creationId xmlns:a16="http://schemas.microsoft.com/office/drawing/2014/main" id="{8C8A209A-61B4-490E-8923-D7A11692BF52}"/>
               </a:ext>
             </a:extLst>
           </p:cNvPr>
@@ -2808,7 +2808,7 @@
           <p:cNvPr id="9" name="">
             <a:extLst xmlns:a="http://schemas.openxmlformats.org/drawingml/2006/main">
               <a:ext uri="{FF2B5EF4-FFF2-40B4-BE49-F238E27FC236}">
-                <a16:creationId xmlns:a16="http://schemas.microsoft.com/office/drawing/2014/main" id="{3F7411E0-8B2F-46E7-B7B3-1514860915F3}"/>
+                <a16:creationId xmlns:a16="http://schemas.microsoft.com/office/drawing/2014/main" id="{D8B06EA1-38C5-4110-B4C6-A75386DC5BE5}"/>
               </a:ext>
             </a:extLst>
           </p:cNvPr>
@@ -2865,7 +2865,7 @@
           <p:cNvPr id="10" name="">
             <a:extLst xmlns:a="http://schemas.openxmlformats.org/drawingml/2006/main">
               <a:ext uri="{FF2B5EF4-FFF2-40B4-BE49-F238E27FC236}">
-                <a16:creationId xmlns:a16="http://schemas.microsoft.com/office/drawing/2014/main" id="{5F0A4342-7AAF-4C3E-891B-C22D2EB7B829}"/>
+                <a16:creationId xmlns:a16="http://schemas.microsoft.com/office/drawing/2014/main" id="{BC433793-CFE7-4EF2-8199-76502818A733}"/>
               </a:ext>
             </a:extLst>
           </p:cNvPr>
@@ -2922,7 +2922,7 @@
           <p:cNvPr id="11" name="">
             <a:extLst xmlns:a="http://schemas.openxmlformats.org/drawingml/2006/main">
               <a:ext uri="{FF2B5EF4-FFF2-40B4-BE49-F238E27FC236}">
-                <a16:creationId xmlns:a16="http://schemas.microsoft.com/office/drawing/2014/main" id="{B19A027B-4DBC-4BBC-A231-E9F07854AEE3}"/>
+                <a16:creationId xmlns:a16="http://schemas.microsoft.com/office/drawing/2014/main" id="{8A603741-F065-4E41-9884-CD3B484803FC}"/>
               </a:ext>
             </a:extLst>
           </p:cNvPr>
@@ -2979,7 +2979,7 @@
           <p:cNvPr id="12" name="">
             <a:extLst xmlns:a="http://schemas.openxmlformats.org/drawingml/2006/main">
               <a:ext uri="{FF2B5EF4-FFF2-40B4-BE49-F238E27FC236}">
-                <a16:creationId xmlns:a16="http://schemas.microsoft.com/office/drawing/2014/main" id="{D2CA06C8-E401-4AE4-924F-965EB9B84B4E}"/>
+                <a16:creationId xmlns:a16="http://schemas.microsoft.com/office/drawing/2014/main" id="{2D995A43-2032-471A-854E-44FD2B029DCC}"/>
               </a:ext>
             </a:extLst>
           </p:cNvPr>
@@ -3036,7 +3036,7 @@
           <p:cNvPr id="13" name="">
             <a:extLst xmlns:a="http://schemas.openxmlformats.org/drawingml/2006/main">
               <a:ext uri="{FF2B5EF4-FFF2-40B4-BE49-F238E27FC236}">
-                <a16:creationId xmlns:a16="http://schemas.microsoft.com/office/drawing/2014/main" id="{F045C996-0E46-4811-BB3E-B653CD030CE9}"/>
+                <a16:creationId xmlns:a16="http://schemas.microsoft.com/office/drawing/2014/main" id="{07DE3D9C-E3C4-49B5-93BA-370B21AF6AC2}"/>
               </a:ext>
             </a:extLst>
           </p:cNvPr>
@@ -3091,7 +3091,7 @@
     </p:spTree>
     <p:extLst>
       <p:ext uri="{BB962C8B-B14F-4D97-AF65-F5344CB8AC3E}">
-        <p14:creationId xmlns:p14="http://schemas.microsoft.com/office/powerpoint/2010/main" val="508587136"/>
+        <p14:creationId xmlns:p14="http://schemas.microsoft.com/office/powerpoint/2010/main" val="1615240140"/>
       </p:ext>
     </p:extLst>
   </p:cSld>
@@ -3292,7 +3292,7 @@
           <p:cNvPr id="19" name="">
             <a:extLst xmlns:a="http://schemas.openxmlformats.org/drawingml/2006/main">
               <a:ext uri="{FF2B5EF4-FFF2-40B4-BE49-F238E27FC236}">
-                <a16:creationId xmlns:a16="http://schemas.microsoft.com/office/drawing/2014/main" id="{3A294AD6-39CA-4C68-B1A3-DDA56EAD6BD8}"/>
+                <a16:creationId xmlns:a16="http://schemas.microsoft.com/office/drawing/2014/main" id="{E26B7B49-C067-4A10-AD21-3333D9665AE8}"/>
               </a:ext>
             </a:extLst>
           </p:cNvPr>
@@ -3324,7 +3324,7 @@
           <p:cNvPr id="2" name="">
             <a:extLst xmlns:a="http://schemas.openxmlformats.org/drawingml/2006/main">
               <a:ext uri="{FF2B5EF4-FFF2-40B4-BE49-F238E27FC236}">
-                <a16:creationId xmlns:a16="http://schemas.microsoft.com/office/drawing/2014/main" id="{80FF2461-71AD-474B-BB0C-7FC181E1EAC5}"/>
+                <a16:creationId xmlns:a16="http://schemas.microsoft.com/office/drawing/2014/main" id="{A73AFC09-C544-48F6-B984-DF9077FE6EB3}"/>
               </a:ext>
             </a:extLst>
           </p:cNvPr>
@@ -3381,7 +3381,7 @@
           <p:cNvPr id="3" name="">
             <a:extLst xmlns:a="http://schemas.openxmlformats.org/drawingml/2006/main">
               <a:ext uri="{FF2B5EF4-FFF2-40B4-BE49-F238E27FC236}">
-                <a16:creationId xmlns:a16="http://schemas.microsoft.com/office/drawing/2014/main" id="{9B207262-F6EA-400B-86C2-45365F75FC1C}"/>
+                <a16:creationId xmlns:a16="http://schemas.microsoft.com/office/drawing/2014/main" id="{CD0DA94D-487F-4471-9024-A2A160532F37}"/>
               </a:ext>
             </a:extLst>
           </p:cNvPr>
@@ -3413,7 +3413,7 @@
           <p:cNvPr id="4" name="">
             <a:extLst xmlns:a="http://schemas.openxmlformats.org/drawingml/2006/main">
               <a:ext uri="{FF2B5EF4-FFF2-40B4-BE49-F238E27FC236}">
-                <a16:creationId xmlns:a16="http://schemas.microsoft.com/office/drawing/2014/main" id="{76063802-2942-430A-85CD-FC38016F331D}"/>
+                <a16:creationId xmlns:a16="http://schemas.microsoft.com/office/drawing/2014/main" id="{7DAB52BC-AE84-44D7-8BBD-F0151069D2B6}"/>
               </a:ext>
             </a:extLst>
           </p:cNvPr>
@@ -3470,7 +3470,7 @@
           <p:cNvPr id="5" name="">
             <a:extLst xmlns:a="http://schemas.openxmlformats.org/drawingml/2006/main">
               <a:ext uri="{FF2B5EF4-FFF2-40B4-BE49-F238E27FC236}">
-                <a16:creationId xmlns:a16="http://schemas.microsoft.com/office/drawing/2014/main" id="{705CC5C5-0839-4C9B-9BB9-A991346383B1}"/>
+                <a16:creationId xmlns:a16="http://schemas.microsoft.com/office/drawing/2014/main" id="{9C4944FC-FFB8-41CF-B6B1-8ECFB7AEB2A5}"/>
               </a:ext>
             </a:extLst>
           </p:cNvPr>
@@ -3527,7 +3527,7 @@
           <p:cNvPr id="6" name="">
             <a:extLst xmlns:a="http://schemas.openxmlformats.org/drawingml/2006/main">
               <a:ext uri="{FF2B5EF4-FFF2-40B4-BE49-F238E27FC236}">
-                <a16:creationId xmlns:a16="http://schemas.microsoft.com/office/drawing/2014/main" id="{2CAD5171-947B-48C3-9C45-B597AC4F19EF}"/>
+                <a16:creationId xmlns:a16="http://schemas.microsoft.com/office/drawing/2014/main" id="{E3E91FDD-CA44-473B-B736-DD057D536C44}"/>
               </a:ext>
             </a:extLst>
           </p:cNvPr>
@@ -3584,7 +3584,7 @@
           <p:cNvPr id="7" name="">
             <a:extLst xmlns:a="http://schemas.openxmlformats.org/drawingml/2006/main">
               <a:ext uri="{FF2B5EF4-FFF2-40B4-BE49-F238E27FC236}">
-                <a16:creationId xmlns:a16="http://schemas.microsoft.com/office/drawing/2014/main" id="{2690FE88-4C33-4851-BCDE-B196A4733654}"/>
+                <a16:creationId xmlns:a16="http://schemas.microsoft.com/office/drawing/2014/main" id="{0216627F-95B9-41BB-92D3-6F749663BF6B}"/>
               </a:ext>
             </a:extLst>
           </p:cNvPr>
@@ -3616,7 +3616,7 @@
           <p:cNvPr id="8" name="">
             <a:extLst xmlns:a="http://schemas.openxmlformats.org/drawingml/2006/main">
               <a:ext uri="{FF2B5EF4-FFF2-40B4-BE49-F238E27FC236}">
-                <a16:creationId xmlns:a16="http://schemas.microsoft.com/office/drawing/2014/main" id="{9E94B3F7-CFD2-4E29-820F-D2040DD10BAE}"/>
+                <a16:creationId xmlns:a16="http://schemas.microsoft.com/office/drawing/2014/main" id="{A4EF4895-384D-40A5-BC1F-59E14E202C9D}"/>
               </a:ext>
             </a:extLst>
           </p:cNvPr>
@@ -3673,7 +3673,7 @@
           <p:cNvPr id="9" name="">
             <a:extLst xmlns:a="http://schemas.openxmlformats.org/drawingml/2006/main">
               <a:ext uri="{FF2B5EF4-FFF2-40B4-BE49-F238E27FC236}">
-                <a16:creationId xmlns:a16="http://schemas.microsoft.com/office/drawing/2014/main" id="{3997D745-97D6-481A-878E-85748795E3E9}"/>
+                <a16:creationId xmlns:a16="http://schemas.microsoft.com/office/drawing/2014/main" id="{684BE893-C0B6-4E2A-B68A-9D972A9CB8A8}"/>
               </a:ext>
             </a:extLst>
           </p:cNvPr>
@@ -3730,7 +3730,7 @@
           <p:cNvPr id="10" name="">
             <a:extLst xmlns:a="http://schemas.openxmlformats.org/drawingml/2006/main">
               <a:ext uri="{FF2B5EF4-FFF2-40B4-BE49-F238E27FC236}">
-                <a16:creationId xmlns:a16="http://schemas.microsoft.com/office/drawing/2014/main" id="{D359A7EE-214F-4F71-8B95-5A055749E089}"/>
+                <a16:creationId xmlns:a16="http://schemas.microsoft.com/office/drawing/2014/main" id="{D14DF0F2-B7AE-471D-938A-FF1F6C1DC103}"/>
               </a:ext>
             </a:extLst>
           </p:cNvPr>
@@ -3787,7 +3787,7 @@
           <p:cNvPr id="11" name="">
             <a:extLst xmlns:a="http://schemas.openxmlformats.org/drawingml/2006/main">
               <a:ext uri="{FF2B5EF4-FFF2-40B4-BE49-F238E27FC236}">
-                <a16:creationId xmlns:a16="http://schemas.microsoft.com/office/drawing/2014/main" id="{CE402954-6489-4960-B53A-65430B857C0E}"/>
+                <a16:creationId xmlns:a16="http://schemas.microsoft.com/office/drawing/2014/main" id="{1B074352-A371-4E9B-85F6-07A2F0E22AA6}"/>
               </a:ext>
             </a:extLst>
           </p:cNvPr>
@@ -3821,7 +3821,7 @@
           <p:cNvPr id="12" name="">
             <a:extLst xmlns:a="http://schemas.openxmlformats.org/drawingml/2006/main">
               <a:ext uri="{FF2B5EF4-FFF2-40B4-BE49-F238E27FC236}">
-                <a16:creationId xmlns:a16="http://schemas.microsoft.com/office/drawing/2014/main" id="{41F419F3-1DC3-4F12-9208-F61AED1E81D0}"/>
+                <a16:creationId xmlns:a16="http://schemas.microsoft.com/office/drawing/2014/main" id="{E148BF8A-9BAB-4CA0-AB4C-D15038C4A2BE}"/>
               </a:ext>
             </a:extLst>
           </p:cNvPr>
@@ -3878,7 +3878,7 @@
           <p:cNvPr id="13" name="">
             <a:extLst xmlns:a="http://schemas.openxmlformats.org/drawingml/2006/main">
               <a:ext uri="{FF2B5EF4-FFF2-40B4-BE49-F238E27FC236}">
-                <a16:creationId xmlns:a16="http://schemas.microsoft.com/office/drawing/2014/main" id="{C7ABB222-5B66-46C9-ABC8-ABD3FC14EC68}"/>
+                <a16:creationId xmlns:a16="http://schemas.microsoft.com/office/drawing/2014/main" id="{6F7194A5-0EED-4CF5-AE91-856E652E9EB9}"/>
               </a:ext>
             </a:extLst>
           </p:cNvPr>
@@ -3935,7 +3935,7 @@
           <p:cNvPr id="14" name="">
             <a:extLst xmlns:a="http://schemas.openxmlformats.org/drawingml/2006/main">
               <a:ext uri="{FF2B5EF4-FFF2-40B4-BE49-F238E27FC236}">
-                <a16:creationId xmlns:a16="http://schemas.microsoft.com/office/drawing/2014/main" id="{C9F219A7-AAF5-42E9-A428-25593393A0C9}"/>
+                <a16:creationId xmlns:a16="http://schemas.microsoft.com/office/drawing/2014/main" id="{901E6F3F-DFF9-44ED-BC21-412D40A87B8B}"/>
               </a:ext>
             </a:extLst>
           </p:cNvPr>
@@ -3992,7 +3992,7 @@
           <p:cNvPr id="15" name="">
             <a:extLst xmlns:a="http://schemas.openxmlformats.org/drawingml/2006/main">
               <a:ext uri="{FF2B5EF4-FFF2-40B4-BE49-F238E27FC236}">
-                <a16:creationId xmlns:a16="http://schemas.microsoft.com/office/drawing/2014/main" id="{174E7CBD-E632-47A0-A413-443AC9BDCA55}"/>
+                <a16:creationId xmlns:a16="http://schemas.microsoft.com/office/drawing/2014/main" id="{844610AA-2BF9-4AF4-A203-1E046961F68A}"/>
               </a:ext>
             </a:extLst>
           </p:cNvPr>
@@ -4026,7 +4026,7 @@
           <p:cNvPr id="16" name="">
             <a:extLst xmlns:a="http://schemas.openxmlformats.org/drawingml/2006/main">
               <a:ext uri="{FF2B5EF4-FFF2-40B4-BE49-F238E27FC236}">
-                <a16:creationId xmlns:a16="http://schemas.microsoft.com/office/drawing/2014/main" id="{2F99D9C5-B201-48C4-AE00-BCC9DD4D2AE2}"/>
+                <a16:creationId xmlns:a16="http://schemas.microsoft.com/office/drawing/2014/main" id="{5802E677-BF8F-4713-A813-0CBFA1C7E8BD}"/>
               </a:ext>
             </a:extLst>
           </p:cNvPr>
@@ -4083,7 +4083,7 @@
           <p:cNvPr id="17" name="">
             <a:extLst xmlns:a="http://schemas.openxmlformats.org/drawingml/2006/main">
               <a:ext uri="{FF2B5EF4-FFF2-40B4-BE49-F238E27FC236}">
-                <a16:creationId xmlns:a16="http://schemas.microsoft.com/office/drawing/2014/main" id="{8FD50957-BA77-4B9A-A748-E297F43B602B}"/>
+                <a16:creationId xmlns:a16="http://schemas.microsoft.com/office/drawing/2014/main" id="{1D5CC9BB-F4F1-4EAE-9CEE-754283EB4E2F}"/>
               </a:ext>
             </a:extLst>
           </p:cNvPr>
@@ -4140,7 +4140,7 @@
           <p:cNvPr id="18" name="">
             <a:extLst xmlns:a="http://schemas.openxmlformats.org/drawingml/2006/main">
               <a:ext uri="{FF2B5EF4-FFF2-40B4-BE49-F238E27FC236}">
-                <a16:creationId xmlns:a16="http://schemas.microsoft.com/office/drawing/2014/main" id="{29FDC09C-C967-431B-9763-225870583878}"/>
+                <a16:creationId xmlns:a16="http://schemas.microsoft.com/office/drawing/2014/main" id="{A8860D4F-AC1B-4B18-9277-F10F67D18E25}"/>
               </a:ext>
             </a:extLst>
           </p:cNvPr>
@@ -4195,7 +4195,7 @@
     </p:spTree>
     <p:extLst>
       <p:ext uri="{BB962C8B-B14F-4D97-AF65-F5344CB8AC3E}">
-        <p14:creationId xmlns:p14="http://schemas.microsoft.com/office/powerpoint/2010/main" val="1459966659"/>
+        <p14:creationId xmlns:p14="http://schemas.microsoft.com/office/powerpoint/2010/main" val="793609029"/>
       </p:ext>
     </p:extLst>
   </p:cSld>
@@ -4350,7 +4350,7 @@
           <p:cNvPr id="23" name="">
             <a:extLst xmlns:a="http://schemas.openxmlformats.org/drawingml/2006/main">
               <a:ext uri="{FF2B5EF4-FFF2-40B4-BE49-F238E27FC236}">
-                <a16:creationId xmlns:a16="http://schemas.microsoft.com/office/drawing/2014/main" id="{7A68480A-0806-46B8-87EE-64D77080DB5B}"/>
+                <a16:creationId xmlns:a16="http://schemas.microsoft.com/office/drawing/2014/main" id="{FFF2E687-2D5B-4B8A-A2AA-7ECC98D07E2A}"/>
               </a:ext>
             </a:extLst>
           </p:cNvPr>
@@ -4382,7 +4382,7 @@
           <p:cNvPr id="2" name="">
             <a:extLst xmlns:a="http://schemas.openxmlformats.org/drawingml/2006/main">
               <a:ext uri="{FF2B5EF4-FFF2-40B4-BE49-F238E27FC236}">
-                <a16:creationId xmlns:a16="http://schemas.microsoft.com/office/drawing/2014/main" id="{7BFE617A-B43D-4751-8D31-B277362C0FEA}"/>
+                <a16:creationId xmlns:a16="http://schemas.microsoft.com/office/drawing/2014/main" id="{D8A39682-A5A6-47FC-8798-059AAD7D8630}"/>
               </a:ext>
             </a:extLst>
           </p:cNvPr>
@@ -4439,7 +4439,7 @@
           <p:cNvPr id="3" name="">
             <a:extLst xmlns:a="http://schemas.openxmlformats.org/drawingml/2006/main">
               <a:ext uri="{FF2B5EF4-FFF2-40B4-BE49-F238E27FC236}">
-                <a16:creationId xmlns:a16="http://schemas.microsoft.com/office/drawing/2014/main" id="{1520F242-2869-4E3A-ADD5-FE2797DB047E}"/>
+                <a16:creationId xmlns:a16="http://schemas.microsoft.com/office/drawing/2014/main" id="{D1933C89-B431-48E2-BE76-FFD27703614B}"/>
               </a:ext>
             </a:extLst>
           </p:cNvPr>
@@ -4471,7 +4471,7 @@
           <p:cNvPr id="4" name="">
             <a:extLst xmlns:a="http://schemas.openxmlformats.org/drawingml/2006/main">
               <a:ext uri="{FF2B5EF4-FFF2-40B4-BE49-F238E27FC236}">
-                <a16:creationId xmlns:a16="http://schemas.microsoft.com/office/drawing/2014/main" id="{F4E1ACE0-F83C-42B3-971E-EFD16267F3AD}"/>
+                <a16:creationId xmlns:a16="http://schemas.microsoft.com/office/drawing/2014/main" id="{68B390B7-F75B-42CD-A63A-FF39D81896F5}"/>
               </a:ext>
             </a:extLst>
           </p:cNvPr>
@@ -4528,7 +4528,7 @@
           <p:cNvPr id="5" name="">
             <a:extLst xmlns:a="http://schemas.openxmlformats.org/drawingml/2006/main">
               <a:ext uri="{FF2B5EF4-FFF2-40B4-BE49-F238E27FC236}">
-                <a16:creationId xmlns:a16="http://schemas.microsoft.com/office/drawing/2014/main" id="{28A76D9B-2D7C-423B-BE0C-214DA44B0BFF}"/>
+                <a16:creationId xmlns:a16="http://schemas.microsoft.com/office/drawing/2014/main" id="{BD2F6D61-3AFE-4BDF-8D8A-82145E796698}"/>
               </a:ext>
             </a:extLst>
           </p:cNvPr>
@@ -4585,7 +4585,7 @@
           <p:cNvPr id="6" name="">
             <a:extLst xmlns:a="http://schemas.openxmlformats.org/drawingml/2006/main">
               <a:ext uri="{FF2B5EF4-FFF2-40B4-BE49-F238E27FC236}">
-                <a16:creationId xmlns:a16="http://schemas.microsoft.com/office/drawing/2014/main" id="{FEB6648D-5F32-4214-8607-65CD66FA36F3}"/>
+                <a16:creationId xmlns:a16="http://schemas.microsoft.com/office/drawing/2014/main" id="{85C7B66D-425E-4E39-8285-497E22B508E1}"/>
               </a:ext>
             </a:extLst>
           </p:cNvPr>
@@ -4642,7 +4642,7 @@
           <p:cNvPr id="7" name="">
             <a:extLst xmlns:a="http://schemas.openxmlformats.org/drawingml/2006/main">
               <a:ext uri="{FF2B5EF4-FFF2-40B4-BE49-F238E27FC236}">
-                <a16:creationId xmlns:a16="http://schemas.microsoft.com/office/drawing/2014/main" id="{84F36644-0674-45C9-9C51-A34042665F4F}"/>
+                <a16:creationId xmlns:a16="http://schemas.microsoft.com/office/drawing/2014/main" id="{47EA7D55-0CD1-42C8-8389-5459E1FD20FD}"/>
               </a:ext>
             </a:extLst>
           </p:cNvPr>
@@ -4674,7 +4674,7 @@
           <p:cNvPr id="8" name="">
             <a:extLst xmlns:a="http://schemas.openxmlformats.org/drawingml/2006/main">
               <a:ext uri="{FF2B5EF4-FFF2-40B4-BE49-F238E27FC236}">
-                <a16:creationId xmlns:a16="http://schemas.microsoft.com/office/drawing/2014/main" id="{5C872294-0A57-49B9-953E-27063C03960F}"/>
+                <a16:creationId xmlns:a16="http://schemas.microsoft.com/office/drawing/2014/main" id="{75095025-1953-48EB-A865-A6402976D3A0}"/>
               </a:ext>
             </a:extLst>
           </p:cNvPr>
@@ -4731,7 +4731,7 @@
           <p:cNvPr id="9" name="">
             <a:extLst xmlns:a="http://schemas.openxmlformats.org/drawingml/2006/main">
               <a:ext uri="{FF2B5EF4-FFF2-40B4-BE49-F238E27FC236}">
-                <a16:creationId xmlns:a16="http://schemas.microsoft.com/office/drawing/2014/main" id="{9FF34996-A35B-4D76-9558-045F895F8309}"/>
+                <a16:creationId xmlns:a16="http://schemas.microsoft.com/office/drawing/2014/main" id="{1FB02731-78BE-436F-BAE4-6577D3B87C13}"/>
               </a:ext>
             </a:extLst>
           </p:cNvPr>
@@ -4788,7 +4788,7 @@
           <p:cNvPr id="10" name="">
             <a:extLst xmlns:a="http://schemas.openxmlformats.org/drawingml/2006/main">
               <a:ext uri="{FF2B5EF4-FFF2-40B4-BE49-F238E27FC236}">
-                <a16:creationId xmlns:a16="http://schemas.microsoft.com/office/drawing/2014/main" id="{259452B9-F426-40F4-9D8A-2E95D7700165}"/>
+                <a16:creationId xmlns:a16="http://schemas.microsoft.com/office/drawing/2014/main" id="{FB95C713-72EE-4FCD-98A2-C89D4C804089}"/>
               </a:ext>
             </a:extLst>
           </p:cNvPr>
@@ -4822,7 +4822,7 @@
           <p:cNvPr id="11" name="">
             <a:extLst xmlns:a="http://schemas.openxmlformats.org/drawingml/2006/main">
               <a:ext uri="{FF2B5EF4-FFF2-40B4-BE49-F238E27FC236}">
-                <a16:creationId xmlns:a16="http://schemas.microsoft.com/office/drawing/2014/main" id="{444C7950-F90C-491C-8DDF-99E61A581A91}"/>
+                <a16:creationId xmlns:a16="http://schemas.microsoft.com/office/drawing/2014/main" id="{11068D2D-D267-4A58-AF4C-9910034C8401}"/>
               </a:ext>
             </a:extLst>
           </p:cNvPr>
@@ -4854,7 +4854,7 @@
           <p:cNvPr id="12" name="">
             <a:extLst xmlns:a="http://schemas.openxmlformats.org/drawingml/2006/main">
               <a:ext uri="{FF2B5EF4-FFF2-40B4-BE49-F238E27FC236}">
-                <a16:creationId xmlns:a16="http://schemas.microsoft.com/office/drawing/2014/main" id="{79D39F8E-1E7A-468D-9640-089A944C039C}"/>
+                <a16:creationId xmlns:a16="http://schemas.microsoft.com/office/drawing/2014/main" id="{A17C3F19-BEF8-4B1E-99C9-8A9CAEDC437C}"/>
               </a:ext>
             </a:extLst>
           </p:cNvPr>
@@ -4911,7 +4911,7 @@
           <p:cNvPr id="13" name="">
             <a:extLst xmlns:a="http://schemas.openxmlformats.org/drawingml/2006/main">
               <a:ext uri="{FF2B5EF4-FFF2-40B4-BE49-F238E27FC236}">
-                <a16:creationId xmlns:a16="http://schemas.microsoft.com/office/drawing/2014/main" id="{73479406-7B87-4043-9F4D-9B1A7A2C0674}"/>
+                <a16:creationId xmlns:a16="http://schemas.microsoft.com/office/drawing/2014/main" id="{9A73E74B-8783-47FE-9BD4-C1C429F2F8AE}"/>
               </a:ext>
             </a:extLst>
           </p:cNvPr>
@@ -4968,7 +4968,7 @@
           <p:cNvPr id="14" name="">
             <a:extLst xmlns:a="http://schemas.openxmlformats.org/drawingml/2006/main">
               <a:ext uri="{FF2B5EF4-FFF2-40B4-BE49-F238E27FC236}">
-                <a16:creationId xmlns:a16="http://schemas.microsoft.com/office/drawing/2014/main" id="{8D1F81B3-7860-4A92-9E27-972CE1EF8168}"/>
+                <a16:creationId xmlns:a16="http://schemas.microsoft.com/office/drawing/2014/main" id="{517D4A6E-1818-4E69-A28E-3CC16FCF827C}"/>
               </a:ext>
             </a:extLst>
           </p:cNvPr>
@@ -5002,7 +5002,7 @@
           <p:cNvPr id="15" name="">
             <a:extLst xmlns:a="http://schemas.openxmlformats.org/drawingml/2006/main">
               <a:ext uri="{FF2B5EF4-FFF2-40B4-BE49-F238E27FC236}">
-                <a16:creationId xmlns:a16="http://schemas.microsoft.com/office/drawing/2014/main" id="{D13A7BDE-25F1-4BB3-962F-6D15D09DFD5B}"/>
+                <a16:creationId xmlns:a16="http://schemas.microsoft.com/office/drawing/2014/main" id="{2E743ADA-CE70-438D-BE01-68801BB4D6B1}"/>
               </a:ext>
             </a:extLst>
           </p:cNvPr>
@@ -5034,7 +5034,7 @@
           <p:cNvPr id="16" name="">
             <a:extLst xmlns:a="http://schemas.openxmlformats.org/drawingml/2006/main">
               <a:ext uri="{FF2B5EF4-FFF2-40B4-BE49-F238E27FC236}">
-                <a16:creationId xmlns:a16="http://schemas.microsoft.com/office/drawing/2014/main" id="{0CFD0ACE-B698-4F47-A565-CC90FD06EEA3}"/>
+                <a16:creationId xmlns:a16="http://schemas.microsoft.com/office/drawing/2014/main" id="{729C24F6-3BED-4ABC-8891-1EFDA9CE07B1}"/>
               </a:ext>
             </a:extLst>
           </p:cNvPr>
@@ -5091,7 +5091,7 @@
           <p:cNvPr id="17" name="">
             <a:extLst xmlns:a="http://schemas.openxmlformats.org/drawingml/2006/main">
               <a:ext uri="{FF2B5EF4-FFF2-40B4-BE49-F238E27FC236}">
-                <a16:creationId xmlns:a16="http://schemas.microsoft.com/office/drawing/2014/main" id="{AC40A306-C1FC-49D5-839E-7FB7EBB43E74}"/>
+                <a16:creationId xmlns:a16="http://schemas.microsoft.com/office/drawing/2014/main" id="{8A92F48B-983B-4FAA-9E85-38DACBD6A2E2}"/>
               </a:ext>
             </a:extLst>
           </p:cNvPr>
@@ -5148,7 +5148,7 @@
           <p:cNvPr id="18" name="">
             <a:extLst xmlns:a="http://schemas.openxmlformats.org/drawingml/2006/main">
               <a:ext uri="{FF2B5EF4-FFF2-40B4-BE49-F238E27FC236}">
-                <a16:creationId xmlns:a16="http://schemas.microsoft.com/office/drawing/2014/main" id="{C6258952-0D64-4FA8-912A-58D2A86DF771}"/>
+                <a16:creationId xmlns:a16="http://schemas.microsoft.com/office/drawing/2014/main" id="{CD8368D9-D50B-4A03-AB73-00932C2E684B}"/>
               </a:ext>
             </a:extLst>
           </p:cNvPr>
@@ -5182,7 +5182,7 @@
           <p:cNvPr id="19" name="">
             <a:extLst xmlns:a="http://schemas.openxmlformats.org/drawingml/2006/main">
               <a:ext uri="{FF2B5EF4-FFF2-40B4-BE49-F238E27FC236}">
-                <a16:creationId xmlns:a16="http://schemas.microsoft.com/office/drawing/2014/main" id="{559EACC4-A3BC-4F4B-B3B9-4079F9C23204}"/>
+                <a16:creationId xmlns:a16="http://schemas.microsoft.com/office/drawing/2014/main" id="{C3355F3F-B175-4A4C-9FFC-08E69D9B75EC}"/>
               </a:ext>
             </a:extLst>
           </p:cNvPr>
@@ -5214,7 +5214,7 @@
           <p:cNvPr id="20" name="">
             <a:extLst xmlns:a="http://schemas.openxmlformats.org/drawingml/2006/main">
               <a:ext uri="{FF2B5EF4-FFF2-40B4-BE49-F238E27FC236}">
-                <a16:creationId xmlns:a16="http://schemas.microsoft.com/office/drawing/2014/main" id="{2504DFCD-45EF-45EB-8BB3-DFB7795ADAC4}"/>
+                <a16:creationId xmlns:a16="http://schemas.microsoft.com/office/drawing/2014/main" id="{1F344294-DDCA-467F-A6F1-04B859DDB5A3}"/>
               </a:ext>
             </a:extLst>
           </p:cNvPr>
@@ -5271,7 +5271,7 @@
           <p:cNvPr id="21" name="">
             <a:extLst xmlns:a="http://schemas.openxmlformats.org/drawingml/2006/main">
               <a:ext uri="{FF2B5EF4-FFF2-40B4-BE49-F238E27FC236}">
-                <a16:creationId xmlns:a16="http://schemas.microsoft.com/office/drawing/2014/main" id="{CC482885-AE5D-475C-AD4A-266AD58F273F}"/>
+                <a16:creationId xmlns:a16="http://schemas.microsoft.com/office/drawing/2014/main" id="{DF8A39D1-83A7-429A-8991-97C28F183396}"/>
               </a:ext>
             </a:extLst>
           </p:cNvPr>
@@ -5328,7 +5328,7 @@
           <p:cNvPr id="22" name="">
             <a:extLst xmlns:a="http://schemas.openxmlformats.org/drawingml/2006/main">
               <a:ext uri="{FF2B5EF4-FFF2-40B4-BE49-F238E27FC236}">
-                <a16:creationId xmlns:a16="http://schemas.microsoft.com/office/drawing/2014/main" id="{447E85E4-4513-4729-AD20-9CE44B443484}"/>
+                <a16:creationId xmlns:a16="http://schemas.microsoft.com/office/drawing/2014/main" id="{A150F39B-D39A-42A3-AE44-B1DE9C0F26FE}"/>
               </a:ext>
             </a:extLst>
           </p:cNvPr>
@@ -5383,7 +5383,7 @@
     </p:spTree>
     <p:extLst>
       <p:ext uri="{BB962C8B-B14F-4D97-AF65-F5344CB8AC3E}">
-        <p14:creationId xmlns:p14="http://schemas.microsoft.com/office/powerpoint/2010/main" val="1668849491"/>
+        <p14:creationId xmlns:p14="http://schemas.microsoft.com/office/powerpoint/2010/main" val="936973809"/>
       </p:ext>
     </p:extLst>
   </p:cSld>
@@ -5584,7 +5584,7 @@
           <p:cNvPr id="23" name="">
             <a:extLst xmlns:a="http://schemas.openxmlformats.org/drawingml/2006/main">
               <a:ext uri="{FF2B5EF4-FFF2-40B4-BE49-F238E27FC236}">
-                <a16:creationId xmlns:a16="http://schemas.microsoft.com/office/drawing/2014/main" id="{ACA2EDEF-578F-47B6-9A1F-FAF1151D581E}"/>
+                <a16:creationId xmlns:a16="http://schemas.microsoft.com/office/drawing/2014/main" id="{5F71F2F7-6C1B-4D62-9E36-F041EED30C5A}"/>
               </a:ext>
             </a:extLst>
           </p:cNvPr>
@@ -5616,7 +5616,7 @@
           <p:cNvPr id="2" name="">
             <a:extLst xmlns:a="http://schemas.openxmlformats.org/drawingml/2006/main">
               <a:ext uri="{FF2B5EF4-FFF2-40B4-BE49-F238E27FC236}">
-                <a16:creationId xmlns:a16="http://schemas.microsoft.com/office/drawing/2014/main" id="{73081716-8CA7-4565-81E6-6A0D5CF704AA}"/>
+                <a16:creationId xmlns:a16="http://schemas.microsoft.com/office/drawing/2014/main" id="{E2BBA72B-AAE7-4695-8A93-480A5450E61F}"/>
               </a:ext>
             </a:extLst>
           </p:cNvPr>
@@ -5673,7 +5673,7 @@
           <p:cNvPr id="3" name="">
             <a:extLst xmlns:a="http://schemas.openxmlformats.org/drawingml/2006/main">
               <a:ext uri="{FF2B5EF4-FFF2-40B4-BE49-F238E27FC236}">
-                <a16:creationId xmlns:a16="http://schemas.microsoft.com/office/drawing/2014/main" id="{CA3F0634-C64E-45C3-98BC-C70448346485}"/>
+                <a16:creationId xmlns:a16="http://schemas.microsoft.com/office/drawing/2014/main" id="{DBBF5716-4D39-44B9-B4B9-CBBA96D6B26D}"/>
               </a:ext>
             </a:extLst>
           </p:cNvPr>
@@ -5705,7 +5705,7 @@
           <p:cNvPr id="4" name="">
             <a:extLst xmlns:a="http://schemas.openxmlformats.org/drawingml/2006/main">
               <a:ext uri="{FF2B5EF4-FFF2-40B4-BE49-F238E27FC236}">
-                <a16:creationId xmlns:a16="http://schemas.microsoft.com/office/drawing/2014/main" id="{42C15B05-4636-49A3-9C78-67DADAA79E1C}"/>
+                <a16:creationId xmlns:a16="http://schemas.microsoft.com/office/drawing/2014/main" id="{8C589219-230C-4276-8A7C-CF58450C5653}"/>
               </a:ext>
             </a:extLst>
           </p:cNvPr>
@@ -5762,7 +5762,7 @@
           <p:cNvPr id="5" name="">
             <a:extLst xmlns:a="http://schemas.openxmlformats.org/drawingml/2006/main">
               <a:ext uri="{FF2B5EF4-FFF2-40B4-BE49-F238E27FC236}">
-                <a16:creationId xmlns:a16="http://schemas.microsoft.com/office/drawing/2014/main" id="{5CC7CB21-71DF-439F-B8DF-7ADAE7C7A204}"/>
+                <a16:creationId xmlns:a16="http://schemas.microsoft.com/office/drawing/2014/main" id="{99B312A5-5E25-4197-BDE2-793ADC3FB2B3}"/>
               </a:ext>
             </a:extLst>
           </p:cNvPr>
@@ -5819,7 +5819,7 @@
           <p:cNvPr id="6" name="">
             <a:extLst xmlns:a="http://schemas.openxmlformats.org/drawingml/2006/main">
               <a:ext uri="{FF2B5EF4-FFF2-40B4-BE49-F238E27FC236}">
-                <a16:creationId xmlns:a16="http://schemas.microsoft.com/office/drawing/2014/main" id="{417E944A-7362-4459-A4A3-3667F39F0697}"/>
+                <a16:creationId xmlns:a16="http://schemas.microsoft.com/office/drawing/2014/main" id="{585F8059-3C92-4CA3-9733-F6178CFB7CC6}"/>
               </a:ext>
             </a:extLst>
           </p:cNvPr>
@@ -5876,7 +5876,7 @@
           <p:cNvPr id="7" name="">
             <a:extLst xmlns:a="http://schemas.openxmlformats.org/drawingml/2006/main">
               <a:ext uri="{FF2B5EF4-FFF2-40B4-BE49-F238E27FC236}">
-                <a16:creationId xmlns:a16="http://schemas.microsoft.com/office/drawing/2014/main" id="{D95B2C58-1F36-43E9-9DC6-266D8F87A79F}"/>
+                <a16:creationId xmlns:a16="http://schemas.microsoft.com/office/drawing/2014/main" id="{F298B621-9F22-4E05-8F8D-47A9ECCE5B63}"/>
               </a:ext>
             </a:extLst>
           </p:cNvPr>
@@ -5908,7 +5908,7 @@
           <p:cNvPr id="8" name="">
             <a:extLst xmlns:a="http://schemas.openxmlformats.org/drawingml/2006/main">
               <a:ext uri="{FF2B5EF4-FFF2-40B4-BE49-F238E27FC236}">
-                <a16:creationId xmlns:a16="http://schemas.microsoft.com/office/drawing/2014/main" id="{03297D35-B0C2-4E77-B7CA-B8FB8050ADF6}"/>
+                <a16:creationId xmlns:a16="http://schemas.microsoft.com/office/drawing/2014/main" id="{AAD3C367-17FD-41B4-A680-65EE9F6C790C}"/>
               </a:ext>
             </a:extLst>
           </p:cNvPr>
@@ -5965,7 +5965,7 @@
           <p:cNvPr id="9" name="">
             <a:extLst xmlns:a="http://schemas.openxmlformats.org/drawingml/2006/main">
               <a:ext uri="{FF2B5EF4-FFF2-40B4-BE49-F238E27FC236}">
-                <a16:creationId xmlns:a16="http://schemas.microsoft.com/office/drawing/2014/main" id="{C9B8B4F1-9E46-4FF6-8F4F-802A8CBEB78D}"/>
+                <a16:creationId xmlns:a16="http://schemas.microsoft.com/office/drawing/2014/main" id="{6FA367A3-E7C6-4367-B312-A0E8CE14F3CC}"/>
               </a:ext>
             </a:extLst>
           </p:cNvPr>
@@ -6022,7 +6022,7 @@
           <p:cNvPr id="10" name="">
             <a:extLst xmlns:a="http://schemas.openxmlformats.org/drawingml/2006/main">
               <a:ext uri="{FF2B5EF4-FFF2-40B4-BE49-F238E27FC236}">
-                <a16:creationId xmlns:a16="http://schemas.microsoft.com/office/drawing/2014/main" id="{08D961D4-2086-4FA0-AD2A-A61341842608}"/>
+                <a16:creationId xmlns:a16="http://schemas.microsoft.com/office/drawing/2014/main" id="{C3C415FE-9A74-404E-A34B-CEA15C8C468C}"/>
               </a:ext>
             </a:extLst>
           </p:cNvPr>
@@ -6056,7 +6056,7 @@
           <p:cNvPr id="11" name="">
             <a:extLst xmlns:a="http://schemas.openxmlformats.org/drawingml/2006/main">
               <a:ext uri="{FF2B5EF4-FFF2-40B4-BE49-F238E27FC236}">
-                <a16:creationId xmlns:a16="http://schemas.microsoft.com/office/drawing/2014/main" id="{A55BCE6A-1F26-4226-8845-20A89FAFC4B6}"/>
+                <a16:creationId xmlns:a16="http://schemas.microsoft.com/office/drawing/2014/main" id="{5B05631B-B003-465B-8394-088A4A2F0B34}"/>
               </a:ext>
             </a:extLst>
           </p:cNvPr>
@@ -6088,7 +6088,7 @@
           <p:cNvPr id="12" name="">
             <a:extLst xmlns:a="http://schemas.openxmlformats.org/drawingml/2006/main">
               <a:ext uri="{FF2B5EF4-FFF2-40B4-BE49-F238E27FC236}">
-                <a16:creationId xmlns:a16="http://schemas.microsoft.com/office/drawing/2014/main" id="{54AEBD15-BE00-442E-92A2-31F2503EACA4}"/>
+                <a16:creationId xmlns:a16="http://schemas.microsoft.com/office/drawing/2014/main" id="{4E862988-D791-4AF5-AB01-CD6B9A11414D}"/>
               </a:ext>
             </a:extLst>
           </p:cNvPr>
@@ -6145,7 +6145,7 @@
           <p:cNvPr id="13" name="">
             <a:extLst xmlns:a="http://schemas.openxmlformats.org/drawingml/2006/main">
               <a:ext uri="{FF2B5EF4-FFF2-40B4-BE49-F238E27FC236}">
-                <a16:creationId xmlns:a16="http://schemas.microsoft.com/office/drawing/2014/main" id="{2F56988E-05EF-4688-B2FB-DA02F7196CB6}"/>
+                <a16:creationId xmlns:a16="http://schemas.microsoft.com/office/drawing/2014/main" id="{0CD26607-1FEF-4F0D-9741-A0C1AEE453F7}"/>
               </a:ext>
             </a:extLst>
           </p:cNvPr>
@@ -6202,7 +6202,7 @@
           <p:cNvPr id="14" name="">
             <a:extLst xmlns:a="http://schemas.openxmlformats.org/drawingml/2006/main">
               <a:ext uri="{FF2B5EF4-FFF2-40B4-BE49-F238E27FC236}">
-                <a16:creationId xmlns:a16="http://schemas.microsoft.com/office/drawing/2014/main" id="{9EB60A44-1F43-4BD8-B1CB-19A9203B36F3}"/>
+                <a16:creationId xmlns:a16="http://schemas.microsoft.com/office/drawing/2014/main" id="{73887A6B-2E2F-4A95-A5F8-563F8D5DDAA1}"/>
               </a:ext>
             </a:extLst>
           </p:cNvPr>
@@ -6236,7 +6236,7 @@
           <p:cNvPr id="15" name="">
             <a:extLst xmlns:a="http://schemas.openxmlformats.org/drawingml/2006/main">
               <a:ext uri="{FF2B5EF4-FFF2-40B4-BE49-F238E27FC236}">
-                <a16:creationId xmlns:a16="http://schemas.microsoft.com/office/drawing/2014/main" id="{3E0ED8D7-1788-4CDE-A6A6-B84FEC517339}"/>
+                <a16:creationId xmlns:a16="http://schemas.microsoft.com/office/drawing/2014/main" id="{509355EC-6C48-4234-9A84-D774009E38C6}"/>
               </a:ext>
             </a:extLst>
           </p:cNvPr>
@@ -6268,7 +6268,7 @@
           <p:cNvPr id="16" name="">
             <a:extLst xmlns:a="http://schemas.openxmlformats.org/drawingml/2006/main">
               <a:ext uri="{FF2B5EF4-FFF2-40B4-BE49-F238E27FC236}">
-                <a16:creationId xmlns:a16="http://schemas.microsoft.com/office/drawing/2014/main" id="{C82DCD7A-C352-4BED-AAD5-2CA2C4DBB927}"/>
+                <a16:creationId xmlns:a16="http://schemas.microsoft.com/office/drawing/2014/main" id="{6CDD4EC8-7A5D-4D7F-9524-A496333851B1}"/>
               </a:ext>
             </a:extLst>
           </p:cNvPr>
@@ -6325,7 +6325,7 @@
           <p:cNvPr id="17" name="">
             <a:extLst xmlns:a="http://schemas.openxmlformats.org/drawingml/2006/main">
               <a:ext uri="{FF2B5EF4-FFF2-40B4-BE49-F238E27FC236}">
-                <a16:creationId xmlns:a16="http://schemas.microsoft.com/office/drawing/2014/main" id="{BECDCF09-09B4-40D6-BC8B-3D041416AB34}"/>
+                <a16:creationId xmlns:a16="http://schemas.microsoft.com/office/drawing/2014/main" id="{D3E3FA9C-2DD8-4966-90D6-4D0FF7CBAFFF}"/>
               </a:ext>
             </a:extLst>
           </p:cNvPr>
@@ -6382,7 +6382,7 @@
           <p:cNvPr id="18" name="">
             <a:extLst xmlns:a="http://schemas.openxmlformats.org/drawingml/2006/main">
               <a:ext uri="{FF2B5EF4-FFF2-40B4-BE49-F238E27FC236}">
-                <a16:creationId xmlns:a16="http://schemas.microsoft.com/office/drawing/2014/main" id="{D54E251D-3908-4738-8F1B-A41F2A00EBDB}"/>
+                <a16:creationId xmlns:a16="http://schemas.microsoft.com/office/drawing/2014/main" id="{270458EC-071B-4356-94EC-302EAE06701A}"/>
               </a:ext>
             </a:extLst>
           </p:cNvPr>
@@ -6416,7 +6416,7 @@
           <p:cNvPr id="19" name="">
             <a:extLst xmlns:a="http://schemas.openxmlformats.org/drawingml/2006/main">
               <a:ext uri="{FF2B5EF4-FFF2-40B4-BE49-F238E27FC236}">
-                <a16:creationId xmlns:a16="http://schemas.microsoft.com/office/drawing/2014/main" id="{5E60F0C6-3442-4ECC-B8CE-87AB4FEB4E77}"/>
+                <a16:creationId xmlns:a16="http://schemas.microsoft.com/office/drawing/2014/main" id="{7BE6FD40-89D9-4B77-9B92-CFE40851A70D}"/>
               </a:ext>
             </a:extLst>
           </p:cNvPr>
@@ -6448,7 +6448,7 @@
           <p:cNvPr id="20" name="">
             <a:extLst xmlns:a="http://schemas.openxmlformats.org/drawingml/2006/main">
               <a:ext uri="{FF2B5EF4-FFF2-40B4-BE49-F238E27FC236}">
-                <a16:creationId xmlns:a16="http://schemas.microsoft.com/office/drawing/2014/main" id="{5830AB6C-91DB-4569-86E1-DBDCFA623350}"/>
+                <a16:creationId xmlns:a16="http://schemas.microsoft.com/office/drawing/2014/main" id="{31A98AA4-30BB-4958-84B2-DF6296296864}"/>
               </a:ext>
             </a:extLst>
           </p:cNvPr>
@@ -6505,7 +6505,7 @@
           <p:cNvPr id="21" name="">
             <a:extLst xmlns:a="http://schemas.openxmlformats.org/drawingml/2006/main">
               <a:ext uri="{FF2B5EF4-FFF2-40B4-BE49-F238E27FC236}">
-                <a16:creationId xmlns:a16="http://schemas.microsoft.com/office/drawing/2014/main" id="{CEED2319-B52B-4A1F-B7A7-7E8345FEABE6}"/>
+                <a16:creationId xmlns:a16="http://schemas.microsoft.com/office/drawing/2014/main" id="{25077691-DAC3-4231-BB8F-549DECCD3181}"/>
               </a:ext>
             </a:extLst>
           </p:cNvPr>
@@ -6562,7 +6562,7 @@
           <p:cNvPr id="22" name="">
             <a:extLst xmlns:a="http://schemas.openxmlformats.org/drawingml/2006/main">
               <a:ext uri="{FF2B5EF4-FFF2-40B4-BE49-F238E27FC236}">
-                <a16:creationId xmlns:a16="http://schemas.microsoft.com/office/drawing/2014/main" id="{1564E8AE-B443-4E23-A5B9-415C7CD19194}"/>
+                <a16:creationId xmlns:a16="http://schemas.microsoft.com/office/drawing/2014/main" id="{30E36B0F-EF7C-4A72-A4C9-5A409D54D3ED}"/>
               </a:ext>
             </a:extLst>
           </p:cNvPr>
@@ -6617,7 +6617,7 @@
     </p:spTree>
     <p:extLst>
       <p:ext uri="{BB962C8B-B14F-4D97-AF65-F5344CB8AC3E}">
-        <p14:creationId xmlns:p14="http://schemas.microsoft.com/office/powerpoint/2010/main" val="340428645"/>
+        <p14:creationId xmlns:p14="http://schemas.microsoft.com/office/powerpoint/2010/main" val="280508733"/>
       </p:ext>
     </p:extLst>
   </p:cSld>
@@ -6818,7 +6818,7 @@
           <p:cNvPr id="16" name="">
             <a:extLst xmlns:a="http://schemas.openxmlformats.org/drawingml/2006/main">
               <a:ext uri="{FF2B5EF4-FFF2-40B4-BE49-F238E27FC236}">
-                <a16:creationId xmlns:a16="http://schemas.microsoft.com/office/drawing/2014/main" id="{9E05B268-94A2-4DC4-848D-564E3EE3380E}"/>
+                <a16:creationId xmlns:a16="http://schemas.microsoft.com/office/drawing/2014/main" id="{FD6FBD54-D5F8-458E-AD2B-772D7874F378}"/>
               </a:ext>
             </a:extLst>
           </p:cNvPr>
@@ -6850,7 +6850,7 @@
           <p:cNvPr id="2" name="">
             <a:extLst xmlns:a="http://schemas.openxmlformats.org/drawingml/2006/main">
               <a:ext uri="{FF2B5EF4-FFF2-40B4-BE49-F238E27FC236}">
-                <a16:creationId xmlns:a16="http://schemas.microsoft.com/office/drawing/2014/main" id="{7559EAE7-F8DE-4C6D-A8D2-7AC3B7A38F5D}"/>
+                <a16:creationId xmlns:a16="http://schemas.microsoft.com/office/drawing/2014/main" id="{87B68B8C-450B-41A4-95A2-6D6DCF740741}"/>
               </a:ext>
             </a:extLst>
           </p:cNvPr>
@@ -6907,7 +6907,7 @@
           <p:cNvPr id="3" name="">
             <a:extLst xmlns:a="http://schemas.openxmlformats.org/drawingml/2006/main">
               <a:ext uri="{FF2B5EF4-FFF2-40B4-BE49-F238E27FC236}">
-                <a16:creationId xmlns:a16="http://schemas.microsoft.com/office/drawing/2014/main" id="{1FF3A069-E43A-4D3D-BF76-454C86D709FE}"/>
+                <a16:creationId xmlns:a16="http://schemas.microsoft.com/office/drawing/2014/main" id="{485A4846-6412-429F-819A-CA5E9615A027}"/>
               </a:ext>
             </a:extLst>
           </p:cNvPr>
@@ -6939,7 +6939,7 @@
           <p:cNvPr id="4" name="">
             <a:extLst xmlns:a="http://schemas.openxmlformats.org/drawingml/2006/main">
               <a:ext uri="{FF2B5EF4-FFF2-40B4-BE49-F238E27FC236}">
-                <a16:creationId xmlns:a16="http://schemas.microsoft.com/office/drawing/2014/main" id="{E16C0749-9304-4DEC-B96C-73693A6394D5}"/>
+                <a16:creationId xmlns:a16="http://schemas.microsoft.com/office/drawing/2014/main" id="{C46D703F-ACB5-4B57-B230-5D2DF407A048}"/>
               </a:ext>
             </a:extLst>
           </p:cNvPr>
@@ -6996,7 +6996,7 @@
           <p:cNvPr id="5" name="">
             <a:extLst xmlns:a="http://schemas.openxmlformats.org/drawingml/2006/main">
               <a:ext uri="{FF2B5EF4-FFF2-40B4-BE49-F238E27FC236}">
-                <a16:creationId xmlns:a16="http://schemas.microsoft.com/office/drawing/2014/main" id="{6AD368B5-6297-471F-A906-C41257D5C353}"/>
+                <a16:creationId xmlns:a16="http://schemas.microsoft.com/office/drawing/2014/main" id="{6557869F-829A-43BB-A337-F66A62472662}"/>
               </a:ext>
             </a:extLst>
           </p:cNvPr>
@@ -7053,7 +7053,7 @@
           <p:cNvPr id="6" name="">
             <a:extLst xmlns:a="http://schemas.openxmlformats.org/drawingml/2006/main">
               <a:ext uri="{FF2B5EF4-FFF2-40B4-BE49-F238E27FC236}">
-                <a16:creationId xmlns:a16="http://schemas.microsoft.com/office/drawing/2014/main" id="{03C18CA6-4697-4578-B69C-18562A7F4276}"/>
+                <a16:creationId xmlns:a16="http://schemas.microsoft.com/office/drawing/2014/main" id="{6E0286F8-337C-4E6D-9147-CCB87079CF99}"/>
               </a:ext>
             </a:extLst>
           </p:cNvPr>
@@ -7110,7 +7110,7 @@
           <p:cNvPr id="7" name="">
             <a:extLst xmlns:a="http://schemas.openxmlformats.org/drawingml/2006/main">
               <a:ext uri="{FF2B5EF4-FFF2-40B4-BE49-F238E27FC236}">
-                <a16:creationId xmlns:a16="http://schemas.microsoft.com/office/drawing/2014/main" id="{574E5FCD-623A-49B7-980D-B15D9EFA3D96}"/>
+                <a16:creationId xmlns:a16="http://schemas.microsoft.com/office/drawing/2014/main" id="{7A0AA376-1DA7-4D4B-B1F9-44FFD7033374}"/>
               </a:ext>
             </a:extLst>
           </p:cNvPr>
@@ -7142,7 +7142,7 @@
           <p:cNvPr id="8" name="">
             <a:extLst xmlns:a="http://schemas.openxmlformats.org/drawingml/2006/main">
               <a:ext uri="{FF2B5EF4-FFF2-40B4-BE49-F238E27FC236}">
-                <a16:creationId xmlns:a16="http://schemas.microsoft.com/office/drawing/2014/main" id="{5EC758EA-8A3C-4A87-914D-8D9AF2FD00B1}"/>
+                <a16:creationId xmlns:a16="http://schemas.microsoft.com/office/drawing/2014/main" id="{E36B4934-988D-4E3F-9207-24A2A251F0F0}"/>
               </a:ext>
             </a:extLst>
           </p:cNvPr>
@@ -7199,7 +7199,7 @@
           <p:cNvPr id="9" name="">
             <a:extLst xmlns:a="http://schemas.openxmlformats.org/drawingml/2006/main">
               <a:ext uri="{FF2B5EF4-FFF2-40B4-BE49-F238E27FC236}">
-                <a16:creationId xmlns:a16="http://schemas.microsoft.com/office/drawing/2014/main" id="{A412AB4E-DE3A-41E0-A9DB-023E1D8D45C3}"/>
+                <a16:creationId xmlns:a16="http://schemas.microsoft.com/office/drawing/2014/main" id="{D321E45A-6A6A-455A-AD72-4A423B97BFB2}"/>
               </a:ext>
             </a:extLst>
           </p:cNvPr>
@@ -7256,7 +7256,7 @@
           <p:cNvPr id="10" name="">
             <a:extLst xmlns:a="http://schemas.openxmlformats.org/drawingml/2006/main">
               <a:ext uri="{FF2B5EF4-FFF2-40B4-BE49-F238E27FC236}">
-                <a16:creationId xmlns:a16="http://schemas.microsoft.com/office/drawing/2014/main" id="{74EDB002-BEE3-42C8-A750-CA98B978D749}"/>
+                <a16:creationId xmlns:a16="http://schemas.microsoft.com/office/drawing/2014/main" id="{C8421FC0-B8B2-40E9-A73C-D7BE7ACD15A5}"/>
               </a:ext>
             </a:extLst>
           </p:cNvPr>
@@ -7313,7 +7313,7 @@
           <p:cNvPr id="11" name="">
             <a:extLst xmlns:a="http://schemas.openxmlformats.org/drawingml/2006/main">
               <a:ext uri="{FF2B5EF4-FFF2-40B4-BE49-F238E27FC236}">
-                <a16:creationId xmlns:a16="http://schemas.microsoft.com/office/drawing/2014/main" id="{4BFD8138-6CC3-4152-B3D8-D34457E28DF3}"/>
+                <a16:creationId xmlns:a16="http://schemas.microsoft.com/office/drawing/2014/main" id="{E7025AB9-82F2-4078-B8B4-9D582C76AA09}"/>
               </a:ext>
             </a:extLst>
           </p:cNvPr>
@@ -7345,7 +7345,7 @@
           <p:cNvPr id="12" name="">
             <a:extLst xmlns:a="http://schemas.openxmlformats.org/drawingml/2006/main">
               <a:ext uri="{FF2B5EF4-FFF2-40B4-BE49-F238E27FC236}">
-                <a16:creationId xmlns:a16="http://schemas.microsoft.com/office/drawing/2014/main" id="{76778B7D-423C-4DBC-AB7A-DB3283A03D8D}"/>
+                <a16:creationId xmlns:a16="http://schemas.microsoft.com/office/drawing/2014/main" id="{7F95EEEF-38AE-4D59-8EBC-C8B73ADA8992}"/>
               </a:ext>
             </a:extLst>
           </p:cNvPr>
@@ -7402,7 +7402,7 @@
           <p:cNvPr id="13" name="">
             <a:extLst xmlns:a="http://schemas.openxmlformats.org/drawingml/2006/main">
               <a:ext uri="{FF2B5EF4-FFF2-40B4-BE49-F238E27FC236}">
-                <a16:creationId xmlns:a16="http://schemas.microsoft.com/office/drawing/2014/main" id="{F9A6B41A-CF76-49C0-919D-25432F6D07FC}"/>
+                <a16:creationId xmlns:a16="http://schemas.microsoft.com/office/drawing/2014/main" id="{9DBACBCE-F427-4FEA-AADD-7374CA2CF43B}"/>
               </a:ext>
             </a:extLst>
           </p:cNvPr>
@@ -7459,7 +7459,7 @@
           <p:cNvPr id="14" name="">
             <a:extLst xmlns:a="http://schemas.openxmlformats.org/drawingml/2006/main">
               <a:ext uri="{FF2B5EF4-FFF2-40B4-BE49-F238E27FC236}">
-                <a16:creationId xmlns:a16="http://schemas.microsoft.com/office/drawing/2014/main" id="{B79A625E-8C91-4F43-BB48-5397211B750C}"/>
+                <a16:creationId xmlns:a16="http://schemas.microsoft.com/office/drawing/2014/main" id="{DB1AF42F-062D-48D8-A570-63CD6D439C42}"/>
               </a:ext>
             </a:extLst>
           </p:cNvPr>
@@ -7516,7 +7516,7 @@
           <p:cNvPr id="15" name="">
             <a:extLst xmlns:a="http://schemas.openxmlformats.org/drawingml/2006/main">
               <a:ext uri="{FF2B5EF4-FFF2-40B4-BE49-F238E27FC236}">
-                <a16:creationId xmlns:a16="http://schemas.microsoft.com/office/drawing/2014/main" id="{CF525865-9A64-4038-9F91-3383B2CFE29D}"/>
+                <a16:creationId xmlns:a16="http://schemas.microsoft.com/office/drawing/2014/main" id="{9DEF0CA7-91D2-4144-971C-DCC510A88BE0}"/>
               </a:ext>
             </a:extLst>
           </p:cNvPr>
@@ -7571,7 +7571,7 @@
     </p:spTree>
     <p:extLst>
       <p:ext uri="{BB962C8B-B14F-4D97-AF65-F5344CB8AC3E}">
-        <p14:creationId xmlns:p14="http://schemas.microsoft.com/office/powerpoint/2010/main" val="2024808516"/>
+        <p14:creationId xmlns:p14="http://schemas.microsoft.com/office/powerpoint/2010/main" val="1132980244"/>
       </p:ext>
     </p:extLst>
   </p:cSld>
@@ -7772,7 +7772,7 @@
           <p:cNvPr id="23" name="">
             <a:extLst xmlns:a="http://schemas.openxmlformats.org/drawingml/2006/main">
               <a:ext uri="{FF2B5EF4-FFF2-40B4-BE49-F238E27FC236}">
-                <a16:creationId xmlns:a16="http://schemas.microsoft.com/office/drawing/2014/main" id="{3A140E82-ED8D-4D13-86A3-2C4F46CB9C12}"/>
+                <a16:creationId xmlns:a16="http://schemas.microsoft.com/office/drawing/2014/main" id="{5C356129-9440-49B9-8C27-BF1ADAEBEC0E}"/>
               </a:ext>
             </a:extLst>
           </p:cNvPr>
@@ -7804,7 +7804,7 @@
           <p:cNvPr id="2" name="">
             <a:extLst xmlns:a="http://schemas.openxmlformats.org/drawingml/2006/main">
               <a:ext uri="{FF2B5EF4-FFF2-40B4-BE49-F238E27FC236}">
-                <a16:creationId xmlns:a16="http://schemas.microsoft.com/office/drawing/2014/main" id="{2AC58F87-DCF8-45C3-B37E-67C880ED116F}"/>
+                <a16:creationId xmlns:a16="http://schemas.microsoft.com/office/drawing/2014/main" id="{DD7438A5-1A1F-4DE0-9522-3CB7CD98D722}"/>
               </a:ext>
             </a:extLst>
           </p:cNvPr>
@@ -7861,7 +7861,7 @@
           <p:cNvPr id="3" name="">
             <a:extLst xmlns:a="http://schemas.openxmlformats.org/drawingml/2006/main">
               <a:ext uri="{FF2B5EF4-FFF2-40B4-BE49-F238E27FC236}">
-                <a16:creationId xmlns:a16="http://schemas.microsoft.com/office/drawing/2014/main" id="{385E922B-FD94-4BF7-8BED-E20D1E637E18}"/>
+                <a16:creationId xmlns:a16="http://schemas.microsoft.com/office/drawing/2014/main" id="{EF639FD4-E085-4953-AF69-AF1CD8A65146}"/>
               </a:ext>
             </a:extLst>
           </p:cNvPr>
@@ -7893,7 +7893,7 @@
           <p:cNvPr id="4" name="">
             <a:extLst xmlns:a="http://schemas.openxmlformats.org/drawingml/2006/main">
               <a:ext uri="{FF2B5EF4-FFF2-40B4-BE49-F238E27FC236}">
-                <a16:creationId xmlns:a16="http://schemas.microsoft.com/office/drawing/2014/main" id="{D45B2856-6AB8-4FEA-A713-796CF3F1DC6C}"/>
+                <a16:creationId xmlns:a16="http://schemas.microsoft.com/office/drawing/2014/main" id="{1957928D-DE44-4E2D-958B-2E9399AEE87D}"/>
               </a:ext>
             </a:extLst>
           </p:cNvPr>
@@ -7950,7 +7950,7 @@
           <p:cNvPr id="5" name="">
             <a:extLst xmlns:a="http://schemas.openxmlformats.org/drawingml/2006/main">
               <a:ext uri="{FF2B5EF4-FFF2-40B4-BE49-F238E27FC236}">
-                <a16:creationId xmlns:a16="http://schemas.microsoft.com/office/drawing/2014/main" id="{68D60D62-A76D-4813-8B87-AAEBF2318070}"/>
+                <a16:creationId xmlns:a16="http://schemas.microsoft.com/office/drawing/2014/main" id="{C11CC553-F125-4944-A2A3-A869AC41B671}"/>
               </a:ext>
             </a:extLst>
           </p:cNvPr>
@@ -8007,7 +8007,7 @@
           <p:cNvPr id="6" name="">
             <a:extLst xmlns:a="http://schemas.openxmlformats.org/drawingml/2006/main">
               <a:ext uri="{FF2B5EF4-FFF2-40B4-BE49-F238E27FC236}">
-                <a16:creationId xmlns:a16="http://schemas.microsoft.com/office/drawing/2014/main" id="{4F6F8AB9-F428-47CA-B0AF-07FCC98160E5}"/>
+                <a16:creationId xmlns:a16="http://schemas.microsoft.com/office/drawing/2014/main" id="{BA83F6F4-7F1B-46B6-9702-55F3E995A6FE}"/>
               </a:ext>
             </a:extLst>
           </p:cNvPr>
@@ -8064,7 +8064,7 @@
           <p:cNvPr id="7" name="">
             <a:extLst xmlns:a="http://schemas.openxmlformats.org/drawingml/2006/main">
               <a:ext uri="{FF2B5EF4-FFF2-40B4-BE49-F238E27FC236}">
-                <a16:creationId xmlns:a16="http://schemas.microsoft.com/office/drawing/2014/main" id="{277DA9CE-D21B-4189-90DE-11F002148E76}"/>
+                <a16:creationId xmlns:a16="http://schemas.microsoft.com/office/drawing/2014/main" id="{4AD4E59B-7C55-4FBA-9D5A-21A65F06350F}"/>
               </a:ext>
             </a:extLst>
           </p:cNvPr>
@@ -8096,7 +8096,7 @@
           <p:cNvPr id="8" name="">
             <a:extLst xmlns:a="http://schemas.openxmlformats.org/drawingml/2006/main">
               <a:ext uri="{FF2B5EF4-FFF2-40B4-BE49-F238E27FC236}">
-                <a16:creationId xmlns:a16="http://schemas.microsoft.com/office/drawing/2014/main" id="{FE619045-D4CF-490B-8138-3621C20F18F9}"/>
+                <a16:creationId xmlns:a16="http://schemas.microsoft.com/office/drawing/2014/main" id="{D9CF4937-8117-4B47-867A-C98C49719422}"/>
               </a:ext>
             </a:extLst>
           </p:cNvPr>
@@ -8153,7 +8153,7 @@
           <p:cNvPr id="9" name="">
             <a:extLst xmlns:a="http://schemas.openxmlformats.org/drawingml/2006/main">
               <a:ext uri="{FF2B5EF4-FFF2-40B4-BE49-F238E27FC236}">
-                <a16:creationId xmlns:a16="http://schemas.microsoft.com/office/drawing/2014/main" id="{B9B54966-BD80-4FA2-8384-F8B4780729E5}"/>
+                <a16:creationId xmlns:a16="http://schemas.microsoft.com/office/drawing/2014/main" id="{ABBA1908-3A59-4DE9-9E11-97429D9C5370}"/>
               </a:ext>
             </a:extLst>
           </p:cNvPr>
@@ -8210,19 +8210,19 @@
           <p:cNvPr id="10" name="">
             <a:extLst xmlns:a="http://schemas.openxmlformats.org/drawingml/2006/main">
               <a:ext uri="{FF2B5EF4-FFF2-40B4-BE49-F238E27FC236}">
-                <a16:creationId xmlns:a16="http://schemas.microsoft.com/office/drawing/2014/main" id="{0F711EDF-16DA-497A-A32B-8B5EBC48D58C}"/>
-              </a:ext>
-            </a:extLst>
-          </p:cNvPr>
-          <p:cNvSpPr>
-            <a:spLocks xmlns:a="http://schemas.openxmlformats.org/drawingml/2006/main" noGrp="1"/>
-          </p:cNvSpPr>
-          <p:nvPr/>
-        </p:nvSpPr>
-        <p:spPr>
-          <a:xfrm xmlns:a="http://schemas.openxmlformats.org/drawingml/2006/main">
-            <a:off x="914400" y="1257300"/>
-            <a:ext cx="10363200" cy="781050"/>
+                <a16:creationId xmlns:a16="http://schemas.microsoft.com/office/drawing/2014/main" id="{74364492-8524-4C7E-AB42-A2CF3B2261C0}"/>
+              </a:ext>
+            </a:extLst>
+          </p:cNvPr>
+          <p:cNvSpPr>
+            <a:spLocks xmlns:a="http://schemas.openxmlformats.org/drawingml/2006/main" noGrp="1"/>
+          </p:cNvSpPr>
+          <p:nvPr/>
+        </p:nvSpPr>
+        <p:spPr>
+          <a:xfrm xmlns:a="http://schemas.openxmlformats.org/drawingml/2006/main">
+            <a:off x="857250" y="1219200"/>
+            <a:ext cx="10477500" cy="742950"/>
           </a:xfrm>
           <a:prstGeom xmlns:a="http://schemas.openxmlformats.org/drawingml/2006/main" prst="rect">
             <a:avLst/>
@@ -8239,7 +8239,7 @@
           <a:lstStyle xmlns:a="http://schemas.openxmlformats.org/drawingml/2006/main"/>
           <a:p xmlns:a="http://schemas.openxmlformats.org/drawingml/2006/main">
             <a:pPr algn="ctr">
-              <a:defRPr sz="2175" b="1">
+              <a:defRPr sz="2100" b="1">
                 <a:solidFill>
                   <a:srgbClr val="17253A"/>
                 </a:solidFill>
@@ -8249,7 +8249,7 @@
               </a:defRPr>
             </a:pPr>
             <a:r>
-              <a:rPr sz="2175" b="1">
+              <a:rPr sz="2100" b="1">
                 <a:solidFill>
                   <a:srgbClr val="17253A"/>
                 </a:solidFill>
@@ -8267,28 +8267,30 @@
           <p:cNvPr id="11" name="">
             <a:extLst xmlns:a="http://schemas.openxmlformats.org/drawingml/2006/main">
               <a:ext uri="{FF2B5EF4-FFF2-40B4-BE49-F238E27FC236}">
-                <a16:creationId xmlns:a16="http://schemas.microsoft.com/office/drawing/2014/main" id="{28E13A45-6073-4B67-A512-5D4C4BDCD6B4}"/>
-              </a:ext>
-            </a:extLst>
-          </p:cNvPr>
-          <p:cNvSpPr>
-            <a:spLocks xmlns:a="http://schemas.openxmlformats.org/drawingml/2006/main" noGrp="1"/>
-          </p:cNvSpPr>
-          <p:nvPr/>
-        </p:nvSpPr>
-        <p:spPr>
-          <a:xfrm xmlns:a="http://schemas.openxmlformats.org/drawingml/2006/main">
-            <a:off x="1000125" y="2247900"/>
-            <a:ext cx="476250" cy="476250"/>
-          </a:xfrm>
-          <a:prstGeom xmlns:a="http://schemas.openxmlformats.org/drawingml/2006/main" prst="ellipse">
+                <a16:creationId xmlns:a16="http://schemas.microsoft.com/office/drawing/2014/main" id="{6981587E-0612-4FB3-B7AF-EE1FF5D5D11F}"/>
+              </a:ext>
+            </a:extLst>
+          </p:cNvPr>
+          <p:cNvSpPr>
+            <a:spLocks xmlns:a="http://schemas.openxmlformats.org/drawingml/2006/main" noGrp="1"/>
+          </p:cNvSpPr>
+          <p:nvPr/>
+        </p:nvSpPr>
+        <p:spPr>
+          <a:xfrm xmlns:a="http://schemas.openxmlformats.org/drawingml/2006/main">
+            <a:off x="971550" y="2124075"/>
+            <a:ext cx="38100" cy="3524250"/>
+          </a:xfrm>
+          <a:prstGeom xmlns:a="http://schemas.openxmlformats.org/drawingml/2006/main" prst="rect">
             <a:avLst/>
           </a:prstGeom>
           <a:solidFill xmlns:a="http://schemas.openxmlformats.org/drawingml/2006/main">
-            <a:srgbClr val="18324A"/>
+            <a:srgbClr val="2C6E73"/>
           </a:solidFill>
           <a:ln xmlns:a="http://schemas.openxmlformats.org/drawingml/2006/main" w="0">
-            <a:noFill/>
+            <a:solidFill>
+              <a:srgbClr val="2C6E73"/>
+            </a:solidFill>
           </a:ln>
         </p:spPr>
       </p:sp>
@@ -8297,19 +8299,19 @@
           <p:cNvPr id="12" name="">
             <a:extLst xmlns:a="http://schemas.openxmlformats.org/drawingml/2006/main">
               <a:ext uri="{FF2B5EF4-FFF2-40B4-BE49-F238E27FC236}">
-                <a16:creationId xmlns:a16="http://schemas.microsoft.com/office/drawing/2014/main" id="{4AA7ECD4-19FD-487A-8B31-642F3336B63F}"/>
-              </a:ext>
-            </a:extLst>
-          </p:cNvPr>
-          <p:cNvSpPr>
-            <a:spLocks xmlns:a="http://schemas.openxmlformats.org/drawingml/2006/main" noGrp="1"/>
-          </p:cNvSpPr>
-          <p:nvPr/>
-        </p:nvSpPr>
-        <p:spPr>
-          <a:xfrm xmlns:a="http://schemas.openxmlformats.org/drawingml/2006/main">
-            <a:off x="1000125" y="2276475"/>
-            <a:ext cx="476250" cy="419100"/>
+                <a16:creationId xmlns:a16="http://schemas.microsoft.com/office/drawing/2014/main" id="{10F3533D-2229-4D31-A3BD-5B58C166A82A}"/>
+              </a:ext>
+            </a:extLst>
+          </p:cNvPr>
+          <p:cNvSpPr>
+            <a:spLocks xmlns:a="http://schemas.openxmlformats.org/drawingml/2006/main" noGrp="1"/>
+          </p:cNvSpPr>
+          <p:nvPr/>
+        </p:nvSpPr>
+        <p:spPr>
+          <a:xfrm xmlns:a="http://schemas.openxmlformats.org/drawingml/2006/main">
+            <a:off x="1162050" y="2200275"/>
+            <a:ext cx="400050" cy="400050"/>
           </a:xfrm>
           <a:prstGeom xmlns:a="http://schemas.openxmlformats.org/drawingml/2006/main" prst="rect">
             <a:avLst/>
@@ -8326,9 +8328,9 @@
           <a:lstStyle xmlns:a="http://schemas.openxmlformats.org/drawingml/2006/main"/>
           <a:p xmlns:a="http://schemas.openxmlformats.org/drawingml/2006/main">
             <a:pPr algn="ctr">
-              <a:defRPr sz="1350" b="1">
-                <a:solidFill>
-                  <a:srgbClr val="FFFFFF"/>
+              <a:defRPr sz="1125" b="1">
+                <a:solidFill>
+                  <a:srgbClr val="2C6E73"/>
                 </a:solidFill>
                 <a:latin typeface="Arial"/>
                 <a:ea typeface="Arial"/>
@@ -8336,9 +8338,9 @@
               </a:defRPr>
             </a:pPr>
             <a:r>
-              <a:rPr sz="1350" b="1">
-                <a:solidFill>
-                  <a:srgbClr val="FFFFFF"/>
+              <a:rPr sz="1125" b="1">
+                <a:solidFill>
+                  <a:srgbClr val="2C6E73"/>
                 </a:solidFill>
                 <a:latin typeface="Arial"/>
                 <a:ea typeface="Arial"/>
@@ -8354,19 +8356,19 @@
           <p:cNvPr id="13" name="">
             <a:extLst xmlns:a="http://schemas.openxmlformats.org/drawingml/2006/main">
               <a:ext uri="{FF2B5EF4-FFF2-40B4-BE49-F238E27FC236}">
-                <a16:creationId xmlns:a16="http://schemas.microsoft.com/office/drawing/2014/main" id="{26F3D31E-707A-44F7-9BD9-86F5046CF2FC}"/>
-              </a:ext>
-            </a:extLst>
-          </p:cNvPr>
-          <p:cNvSpPr>
-            <a:spLocks xmlns:a="http://schemas.openxmlformats.org/drawingml/2006/main" noGrp="1"/>
-          </p:cNvSpPr>
-          <p:nvPr/>
-        </p:nvSpPr>
-        <p:spPr>
-          <a:xfrm xmlns:a="http://schemas.openxmlformats.org/drawingml/2006/main">
-            <a:off x="1714500" y="2181225"/>
-            <a:ext cx="9429750" cy="609600"/>
+                <a16:creationId xmlns:a16="http://schemas.microsoft.com/office/drawing/2014/main" id="{EBF3D55B-A89F-4356-86DB-13ED8EDE3BFA}"/>
+              </a:ext>
+            </a:extLst>
+          </p:cNvPr>
+          <p:cNvSpPr>
+            <a:spLocks xmlns:a="http://schemas.openxmlformats.org/drawingml/2006/main" noGrp="1"/>
+          </p:cNvSpPr>
+          <p:nvPr/>
+        </p:nvSpPr>
+        <p:spPr>
+          <a:xfrm xmlns:a="http://schemas.openxmlformats.org/drawingml/2006/main">
+            <a:off x="1714500" y="2114550"/>
+            <a:ext cx="9525000" cy="809625"/>
           </a:xfrm>
           <a:prstGeom xmlns:a="http://schemas.openxmlformats.org/drawingml/2006/main" prst="rect">
             <a:avLst/>
@@ -8383,7 +8385,7 @@
           <a:lstStyle xmlns:a="http://schemas.openxmlformats.org/drawingml/2006/main"/>
           <a:p xmlns:a="http://schemas.openxmlformats.org/drawingml/2006/main">
             <a:pPr algn="l">
-              <a:defRPr sz="1500" b="0">
+              <a:defRPr sz="1725" b="0">
                 <a:solidFill>
                   <a:srgbClr val="17253A"/>
                 </a:solidFill>
@@ -8393,7 +8395,7 @@
               </a:defRPr>
             </a:pPr>
             <a:r>
-              <a:rPr sz="1500" b="0">
+              <a:rPr sz="1725" b="0">
                 <a:solidFill>
                   <a:srgbClr val="17253A"/>
                 </a:solidFill>
@@ -8401,7 +8403,7 @@
                 <a:ea typeface="Arial"/>
                 <a:cs typeface="Arial"/>
               </a:rPr>
-              <a:t>Identify the structure: Read the title, labels, scale and total before calculating.</a:t>
+              <a:t>12 + 15 + 18 + 11 + 19</a:t>
             </a:r>
           </a:p>
         </p:txBody>
@@ -8411,28 +8413,30 @@
           <p:cNvPr id="14" name="">
             <a:extLst xmlns:a="http://schemas.openxmlformats.org/drawingml/2006/main">
               <a:ext uri="{FF2B5EF4-FFF2-40B4-BE49-F238E27FC236}">
-                <a16:creationId xmlns:a16="http://schemas.microsoft.com/office/drawing/2014/main" id="{1F37EB22-0414-463B-8687-E15E3EDD7F0E}"/>
-              </a:ext>
-            </a:extLst>
-          </p:cNvPr>
-          <p:cNvSpPr>
-            <a:spLocks xmlns:a="http://schemas.openxmlformats.org/drawingml/2006/main" noGrp="1"/>
-          </p:cNvSpPr>
-          <p:nvPr/>
-        </p:nvSpPr>
-        <p:spPr>
-          <a:xfrm xmlns:a="http://schemas.openxmlformats.org/drawingml/2006/main">
-            <a:off x="1000125" y="2990850"/>
-            <a:ext cx="476250" cy="476250"/>
-          </a:xfrm>
-          <a:prstGeom xmlns:a="http://schemas.openxmlformats.org/drawingml/2006/main" prst="ellipse">
+                <a16:creationId xmlns:a16="http://schemas.microsoft.com/office/drawing/2014/main" id="{4200EFFF-184F-4C6B-B138-11BAF0A67458}"/>
+              </a:ext>
+            </a:extLst>
+          </p:cNvPr>
+          <p:cNvSpPr>
+            <a:spLocks xmlns:a="http://schemas.openxmlformats.org/drawingml/2006/main" noGrp="1"/>
+          </p:cNvSpPr>
+          <p:nvPr/>
+        </p:nvSpPr>
+        <p:spPr>
+          <a:xfrm xmlns:a="http://schemas.openxmlformats.org/drawingml/2006/main">
+            <a:off x="1714500" y="2943225"/>
+            <a:ext cx="9334500" cy="9525"/>
+          </a:xfrm>
+          <a:prstGeom xmlns:a="http://schemas.openxmlformats.org/drawingml/2006/main" prst="rect">
             <a:avLst/>
           </a:prstGeom>
           <a:solidFill xmlns:a="http://schemas.openxmlformats.org/drawingml/2006/main">
-            <a:srgbClr val="2C6E73"/>
+            <a:srgbClr val="D9E0E6"/>
           </a:solidFill>
           <a:ln xmlns:a="http://schemas.openxmlformats.org/drawingml/2006/main" w="0">
-            <a:noFill/>
+            <a:solidFill>
+              <a:srgbClr val="D9E0E6"/>
+            </a:solidFill>
           </a:ln>
         </p:spPr>
       </p:sp>
@@ -8441,19 +8445,19 @@
           <p:cNvPr id="15" name="">
             <a:extLst xmlns:a="http://schemas.openxmlformats.org/drawingml/2006/main">
               <a:ext uri="{FF2B5EF4-FFF2-40B4-BE49-F238E27FC236}">
-                <a16:creationId xmlns:a16="http://schemas.microsoft.com/office/drawing/2014/main" id="{090FCB5E-7C4F-490B-BDCC-3D0B70F79FB8}"/>
-              </a:ext>
-            </a:extLst>
-          </p:cNvPr>
-          <p:cNvSpPr>
-            <a:spLocks xmlns:a="http://schemas.openxmlformats.org/drawingml/2006/main" noGrp="1"/>
-          </p:cNvSpPr>
-          <p:nvPr/>
-        </p:nvSpPr>
-        <p:spPr>
-          <a:xfrm xmlns:a="http://schemas.openxmlformats.org/drawingml/2006/main">
-            <a:off x="1000125" y="3019425"/>
-            <a:ext cx="476250" cy="419100"/>
+                <a16:creationId xmlns:a16="http://schemas.microsoft.com/office/drawing/2014/main" id="{F3678B30-C78E-42C9-A04B-1B26FE6CC3B3}"/>
+              </a:ext>
+            </a:extLst>
+          </p:cNvPr>
+          <p:cNvSpPr>
+            <a:spLocks xmlns:a="http://schemas.openxmlformats.org/drawingml/2006/main" noGrp="1"/>
+          </p:cNvSpPr>
+          <p:nvPr/>
+        </p:nvSpPr>
+        <p:spPr>
+          <a:xfrm xmlns:a="http://schemas.openxmlformats.org/drawingml/2006/main">
+            <a:off x="1162050" y="3076575"/>
+            <a:ext cx="400050" cy="400050"/>
           </a:xfrm>
           <a:prstGeom xmlns:a="http://schemas.openxmlformats.org/drawingml/2006/main" prst="rect">
             <a:avLst/>
@@ -8470,9 +8474,9 @@
           <a:lstStyle xmlns:a="http://schemas.openxmlformats.org/drawingml/2006/main"/>
           <a:p xmlns:a="http://schemas.openxmlformats.org/drawingml/2006/main">
             <a:pPr algn="ctr">
-              <a:defRPr sz="1350" b="1">
-                <a:solidFill>
-                  <a:srgbClr val="FFFFFF"/>
+              <a:defRPr sz="1125" b="1">
+                <a:solidFill>
+                  <a:srgbClr val="2C6E73"/>
                 </a:solidFill>
                 <a:latin typeface="Arial"/>
                 <a:ea typeface="Arial"/>
@@ -8480,9 +8484,9 @@
               </a:defRPr>
             </a:pPr>
             <a:r>
-              <a:rPr sz="1350" b="1">
-                <a:solidFill>
-                  <a:srgbClr val="FFFFFF"/>
+              <a:rPr sz="1125" b="1">
+                <a:solidFill>
+                  <a:srgbClr val="2C6E73"/>
                 </a:solidFill>
                 <a:latin typeface="Arial"/>
                 <a:ea typeface="Arial"/>
@@ -8498,19 +8502,19 @@
           <p:cNvPr id="16" name="">
             <a:extLst xmlns:a="http://schemas.openxmlformats.org/drawingml/2006/main">
               <a:ext uri="{FF2B5EF4-FFF2-40B4-BE49-F238E27FC236}">
-                <a16:creationId xmlns:a16="http://schemas.microsoft.com/office/drawing/2014/main" id="{E4CC8C9C-47F0-42B8-8851-FC36186C30F8}"/>
-              </a:ext>
-            </a:extLst>
-          </p:cNvPr>
-          <p:cNvSpPr>
-            <a:spLocks xmlns:a="http://schemas.openxmlformats.org/drawingml/2006/main" noGrp="1"/>
-          </p:cNvSpPr>
-          <p:nvPr/>
-        </p:nvSpPr>
-        <p:spPr>
-          <a:xfrm xmlns:a="http://schemas.openxmlformats.org/drawingml/2006/main">
-            <a:off x="1714500" y="2924175"/>
-            <a:ext cx="9429750" cy="609600"/>
+                <a16:creationId xmlns:a16="http://schemas.microsoft.com/office/drawing/2014/main" id="{7D8CF2B7-E2A2-4119-89A9-E4E72FAF8C35}"/>
+              </a:ext>
+            </a:extLst>
+          </p:cNvPr>
+          <p:cNvSpPr>
+            <a:spLocks xmlns:a="http://schemas.openxmlformats.org/drawingml/2006/main" noGrp="1"/>
+          </p:cNvSpPr>
+          <p:nvPr/>
+        </p:nvSpPr>
+        <p:spPr>
+          <a:xfrm xmlns:a="http://schemas.openxmlformats.org/drawingml/2006/main">
+            <a:off x="1714500" y="2990850"/>
+            <a:ext cx="9525000" cy="809625"/>
           </a:xfrm>
           <a:prstGeom xmlns:a="http://schemas.openxmlformats.org/drawingml/2006/main" prst="rect">
             <a:avLst/>
@@ -8527,7 +8531,7 @@
           <a:lstStyle xmlns:a="http://schemas.openxmlformats.org/drawingml/2006/main"/>
           <a:p xmlns:a="http://schemas.openxmlformats.org/drawingml/2006/main">
             <a:pPr algn="l">
-              <a:defRPr sz="1500" b="0">
+              <a:defRPr sz="1725" b="0">
                 <a:solidFill>
                   <a:srgbClr val="17253A"/>
                 </a:solidFill>
@@ -8537,7 +8541,7 @@
               </a:defRPr>
             </a:pPr>
             <a:r>
-              <a:rPr sz="1500" b="0">
+              <a:rPr sz="1725" b="0">
                 <a:solidFill>
                   <a:srgbClr val="17253A"/>
                 </a:solidFill>
@@ -8545,7 +8549,7 @@
                 <a:ea typeface="Arial"/>
                 <a:cs typeface="Arial"/>
               </a:rPr>
-              <a:t>Set up the method: Use proportional reasoning or add then divide for the mean.</a:t>
+              <a:t>Total = 75</a:t>
             </a:r>
           </a:p>
         </p:txBody>
@@ -8555,28 +8559,30 @@
           <p:cNvPr id="17" name="">
             <a:extLst xmlns:a="http://schemas.openxmlformats.org/drawingml/2006/main">
               <a:ext uri="{FF2B5EF4-FFF2-40B4-BE49-F238E27FC236}">
-                <a16:creationId xmlns:a16="http://schemas.microsoft.com/office/drawing/2014/main" id="{D3B7FBE2-309A-4D16-B9EF-BFD9E26162E0}"/>
-              </a:ext>
-            </a:extLst>
-          </p:cNvPr>
-          <p:cNvSpPr>
-            <a:spLocks xmlns:a="http://schemas.openxmlformats.org/drawingml/2006/main" noGrp="1"/>
-          </p:cNvSpPr>
-          <p:nvPr/>
-        </p:nvSpPr>
-        <p:spPr>
-          <a:xfrm xmlns:a="http://schemas.openxmlformats.org/drawingml/2006/main">
-            <a:off x="1000125" y="3733800"/>
-            <a:ext cx="476250" cy="476250"/>
-          </a:xfrm>
-          <a:prstGeom xmlns:a="http://schemas.openxmlformats.org/drawingml/2006/main" prst="ellipse">
+                <a16:creationId xmlns:a16="http://schemas.microsoft.com/office/drawing/2014/main" id="{4ACCC2E8-3B93-4EFE-BFF9-A966BC7B6147}"/>
+              </a:ext>
+            </a:extLst>
+          </p:cNvPr>
+          <p:cNvSpPr>
+            <a:spLocks xmlns:a="http://schemas.openxmlformats.org/drawingml/2006/main" noGrp="1"/>
+          </p:cNvSpPr>
+          <p:nvPr/>
+        </p:nvSpPr>
+        <p:spPr>
+          <a:xfrm xmlns:a="http://schemas.openxmlformats.org/drawingml/2006/main">
+            <a:off x="1714500" y="3819525"/>
+            <a:ext cx="9334500" cy="9525"/>
+          </a:xfrm>
+          <a:prstGeom xmlns:a="http://schemas.openxmlformats.org/drawingml/2006/main" prst="rect">
             <a:avLst/>
           </a:prstGeom>
           <a:solidFill xmlns:a="http://schemas.openxmlformats.org/drawingml/2006/main">
-            <a:srgbClr val="2C6E73"/>
+            <a:srgbClr val="D9E0E6"/>
           </a:solidFill>
           <a:ln xmlns:a="http://schemas.openxmlformats.org/drawingml/2006/main" w="0">
-            <a:noFill/>
+            <a:solidFill>
+              <a:srgbClr val="D9E0E6"/>
+            </a:solidFill>
           </a:ln>
         </p:spPr>
       </p:sp>
@@ -8585,19 +8591,19 @@
           <p:cNvPr id="18" name="">
             <a:extLst xmlns:a="http://schemas.openxmlformats.org/drawingml/2006/main">
               <a:ext uri="{FF2B5EF4-FFF2-40B4-BE49-F238E27FC236}">
-                <a16:creationId xmlns:a16="http://schemas.microsoft.com/office/drawing/2014/main" id="{DCDF2359-9484-4C67-B4FC-A8C7438CEED4}"/>
-              </a:ext>
-            </a:extLst>
-          </p:cNvPr>
-          <p:cNvSpPr>
-            <a:spLocks xmlns:a="http://schemas.openxmlformats.org/drawingml/2006/main" noGrp="1"/>
-          </p:cNvSpPr>
-          <p:nvPr/>
-        </p:nvSpPr>
-        <p:spPr>
-          <a:xfrm xmlns:a="http://schemas.openxmlformats.org/drawingml/2006/main">
-            <a:off x="1000125" y="3762375"/>
-            <a:ext cx="476250" cy="419100"/>
+                <a16:creationId xmlns:a16="http://schemas.microsoft.com/office/drawing/2014/main" id="{126FCCE4-6111-46B4-92D0-894729981438}"/>
+              </a:ext>
+            </a:extLst>
+          </p:cNvPr>
+          <p:cNvSpPr>
+            <a:spLocks xmlns:a="http://schemas.openxmlformats.org/drawingml/2006/main" noGrp="1"/>
+          </p:cNvSpPr>
+          <p:nvPr/>
+        </p:nvSpPr>
+        <p:spPr>
+          <a:xfrm xmlns:a="http://schemas.openxmlformats.org/drawingml/2006/main">
+            <a:off x="1162050" y="3952875"/>
+            <a:ext cx="400050" cy="400050"/>
           </a:xfrm>
           <a:prstGeom xmlns:a="http://schemas.openxmlformats.org/drawingml/2006/main" prst="rect">
             <a:avLst/>
@@ -8614,9 +8620,9 @@
           <a:lstStyle xmlns:a="http://schemas.openxmlformats.org/drawingml/2006/main"/>
           <a:p xmlns:a="http://schemas.openxmlformats.org/drawingml/2006/main">
             <a:pPr algn="ctr">
-              <a:defRPr sz="1350" b="1">
-                <a:solidFill>
-                  <a:srgbClr val="FFFFFF"/>
+              <a:defRPr sz="1125" b="1">
+                <a:solidFill>
+                  <a:srgbClr val="2C6E73"/>
                 </a:solidFill>
                 <a:latin typeface="Arial"/>
                 <a:ea typeface="Arial"/>
@@ -8624,9 +8630,9 @@
               </a:defRPr>
             </a:pPr>
             <a:r>
-              <a:rPr sz="1350" b="1">
-                <a:solidFill>
-                  <a:srgbClr val="FFFFFF"/>
+              <a:rPr sz="1125" b="1">
+                <a:solidFill>
+                  <a:srgbClr val="2C6E73"/>
                 </a:solidFill>
                 <a:latin typeface="Arial"/>
                 <a:ea typeface="Arial"/>
@@ -8642,19 +8648,19 @@
           <p:cNvPr id="19" name="">
             <a:extLst xmlns:a="http://schemas.openxmlformats.org/drawingml/2006/main">
               <a:ext uri="{FF2B5EF4-FFF2-40B4-BE49-F238E27FC236}">
-                <a16:creationId xmlns:a16="http://schemas.microsoft.com/office/drawing/2014/main" id="{7C17F5C3-AFC9-4E96-87EF-21AFFEA1EA13}"/>
-              </a:ext>
-            </a:extLst>
-          </p:cNvPr>
-          <p:cNvSpPr>
-            <a:spLocks xmlns:a="http://schemas.openxmlformats.org/drawingml/2006/main" noGrp="1"/>
-          </p:cNvSpPr>
-          <p:nvPr/>
-        </p:nvSpPr>
-        <p:spPr>
-          <a:xfrm xmlns:a="http://schemas.openxmlformats.org/drawingml/2006/main">
-            <a:off x="1714500" y="3667125"/>
-            <a:ext cx="9429750" cy="609600"/>
+                <a16:creationId xmlns:a16="http://schemas.microsoft.com/office/drawing/2014/main" id="{7C9778D2-F0FA-4EA0-AEEA-146932367AE3}"/>
+              </a:ext>
+            </a:extLst>
+          </p:cNvPr>
+          <p:cNvSpPr>
+            <a:spLocks xmlns:a="http://schemas.openxmlformats.org/drawingml/2006/main" noGrp="1"/>
+          </p:cNvSpPr>
+          <p:nvPr/>
+        </p:nvSpPr>
+        <p:spPr>
+          <a:xfrm xmlns:a="http://schemas.openxmlformats.org/drawingml/2006/main">
+            <a:off x="1714500" y="3867150"/>
+            <a:ext cx="9525000" cy="809625"/>
           </a:xfrm>
           <a:prstGeom xmlns:a="http://schemas.openxmlformats.org/drawingml/2006/main" prst="rect">
             <a:avLst/>
@@ -8671,7 +8677,7 @@
           <a:lstStyle xmlns:a="http://schemas.openxmlformats.org/drawingml/2006/main"/>
           <a:p xmlns:a="http://schemas.openxmlformats.org/drawingml/2006/main">
             <a:pPr algn="l">
-              <a:defRPr sz="1500" b="0">
+              <a:defRPr sz="1725" b="0">
                 <a:solidFill>
                   <a:srgbClr val="17253A"/>
                 </a:solidFill>
@@ -8681,7 +8687,7 @@
               </a:defRPr>
             </a:pPr>
             <a:r>
-              <a:rPr sz="1500" b="0">
+              <a:rPr sz="1725" b="0">
                 <a:solidFill>
                   <a:srgbClr val="17253A"/>
                 </a:solidFill>
@@ -8689,7 +8695,7 @@
                 <a:ea typeface="Arial"/>
                 <a:cs typeface="Arial"/>
               </a:rPr>
-              <a:t>Complete the calculation: 15.</a:t>
+              <a:t>There are 5 values</a:t>
             </a:r>
           </a:p>
         </p:txBody>
@@ -8699,28 +8705,30 @@
           <p:cNvPr id="20" name="">
             <a:extLst xmlns:a="http://schemas.openxmlformats.org/drawingml/2006/main">
               <a:ext uri="{FF2B5EF4-FFF2-40B4-BE49-F238E27FC236}">
-                <a16:creationId xmlns:a16="http://schemas.microsoft.com/office/drawing/2014/main" id="{6C3EC18F-D0E2-4CAA-82E0-8E34744F1C9B}"/>
-              </a:ext>
-            </a:extLst>
-          </p:cNvPr>
-          <p:cNvSpPr>
-            <a:spLocks xmlns:a="http://schemas.openxmlformats.org/drawingml/2006/main" noGrp="1"/>
-          </p:cNvSpPr>
-          <p:nvPr/>
-        </p:nvSpPr>
-        <p:spPr>
-          <a:xfrm xmlns:a="http://schemas.openxmlformats.org/drawingml/2006/main">
-            <a:off x="1000125" y="4476750"/>
-            <a:ext cx="476250" cy="476250"/>
-          </a:xfrm>
-          <a:prstGeom xmlns:a="http://schemas.openxmlformats.org/drawingml/2006/main" prst="ellipse">
+                <a16:creationId xmlns:a16="http://schemas.microsoft.com/office/drawing/2014/main" id="{B281DC01-5D07-4771-87D4-7D09784A489E}"/>
+              </a:ext>
+            </a:extLst>
+          </p:cNvPr>
+          <p:cNvSpPr>
+            <a:spLocks xmlns:a="http://schemas.openxmlformats.org/drawingml/2006/main" noGrp="1"/>
+          </p:cNvSpPr>
+          <p:nvPr/>
+        </p:nvSpPr>
+        <p:spPr>
+          <a:xfrm xmlns:a="http://schemas.openxmlformats.org/drawingml/2006/main">
+            <a:off x="1714500" y="4695825"/>
+            <a:ext cx="9334500" cy="9525"/>
+          </a:xfrm>
+          <a:prstGeom xmlns:a="http://schemas.openxmlformats.org/drawingml/2006/main" prst="rect">
             <a:avLst/>
           </a:prstGeom>
           <a:solidFill xmlns:a="http://schemas.openxmlformats.org/drawingml/2006/main">
-            <a:srgbClr val="2C6E73"/>
+            <a:srgbClr val="D9E0E6"/>
           </a:solidFill>
           <a:ln xmlns:a="http://schemas.openxmlformats.org/drawingml/2006/main" w="0">
-            <a:noFill/>
+            <a:solidFill>
+              <a:srgbClr val="D9E0E6"/>
+            </a:solidFill>
           </a:ln>
         </p:spPr>
       </p:sp>
@@ -8729,19 +8737,19 @@
           <p:cNvPr id="21" name="">
             <a:extLst xmlns:a="http://schemas.openxmlformats.org/drawingml/2006/main">
               <a:ext uri="{FF2B5EF4-FFF2-40B4-BE49-F238E27FC236}">
-                <a16:creationId xmlns:a16="http://schemas.microsoft.com/office/drawing/2014/main" id="{F8B6629F-0C21-4927-A7A7-1962D90715F4}"/>
-              </a:ext>
-            </a:extLst>
-          </p:cNvPr>
-          <p:cNvSpPr>
-            <a:spLocks xmlns:a="http://schemas.openxmlformats.org/drawingml/2006/main" noGrp="1"/>
-          </p:cNvSpPr>
-          <p:nvPr/>
-        </p:nvSpPr>
-        <p:spPr>
-          <a:xfrm xmlns:a="http://schemas.openxmlformats.org/drawingml/2006/main">
-            <a:off x="1000125" y="4505325"/>
-            <a:ext cx="476250" cy="419100"/>
+                <a16:creationId xmlns:a16="http://schemas.microsoft.com/office/drawing/2014/main" id="{17302BA7-98E5-4F96-ACEF-6924A811D181}"/>
+              </a:ext>
+            </a:extLst>
+          </p:cNvPr>
+          <p:cNvSpPr>
+            <a:spLocks xmlns:a="http://schemas.openxmlformats.org/drawingml/2006/main" noGrp="1"/>
+          </p:cNvSpPr>
+          <p:nvPr/>
+        </p:nvSpPr>
+        <p:spPr>
+          <a:xfrm xmlns:a="http://schemas.openxmlformats.org/drawingml/2006/main">
+            <a:off x="1162050" y="4829175"/>
+            <a:ext cx="400050" cy="400050"/>
           </a:xfrm>
           <a:prstGeom xmlns:a="http://schemas.openxmlformats.org/drawingml/2006/main" prst="rect">
             <a:avLst/>
@@ -8758,9 +8766,9 @@
           <a:lstStyle xmlns:a="http://schemas.openxmlformats.org/drawingml/2006/main"/>
           <a:p xmlns:a="http://schemas.openxmlformats.org/drawingml/2006/main">
             <a:pPr algn="ctr">
-              <a:defRPr sz="1350" b="1">
-                <a:solidFill>
-                  <a:srgbClr val="FFFFFF"/>
+              <a:defRPr sz="1125" b="1">
+                <a:solidFill>
+                  <a:srgbClr val="2F785D"/>
                 </a:solidFill>
                 <a:latin typeface="Arial"/>
                 <a:ea typeface="Arial"/>
@@ -8768,9 +8776,9 @@
               </a:defRPr>
             </a:pPr>
             <a:r>
-              <a:rPr sz="1350" b="1">
-                <a:solidFill>
-                  <a:srgbClr val="FFFFFF"/>
+              <a:rPr sz="1125" b="1">
+                <a:solidFill>
+                  <a:srgbClr val="2F785D"/>
                 </a:solidFill>
                 <a:latin typeface="Arial"/>
                 <a:ea typeface="Arial"/>
@@ -8786,19 +8794,19 @@
           <p:cNvPr id="22" name="">
             <a:extLst xmlns:a="http://schemas.openxmlformats.org/drawingml/2006/main">
               <a:ext uri="{FF2B5EF4-FFF2-40B4-BE49-F238E27FC236}">
-                <a16:creationId xmlns:a16="http://schemas.microsoft.com/office/drawing/2014/main" id="{16219E3C-A8D6-42A3-A42A-E23145DA3A0C}"/>
-              </a:ext>
-            </a:extLst>
-          </p:cNvPr>
-          <p:cNvSpPr>
-            <a:spLocks xmlns:a="http://schemas.openxmlformats.org/drawingml/2006/main" noGrp="1"/>
-          </p:cNvSpPr>
-          <p:nvPr/>
-        </p:nvSpPr>
-        <p:spPr>
-          <a:xfrm xmlns:a="http://schemas.openxmlformats.org/drawingml/2006/main">
-            <a:off x="1714500" y="4410075"/>
-            <a:ext cx="9429750" cy="609600"/>
+                <a16:creationId xmlns:a16="http://schemas.microsoft.com/office/drawing/2014/main" id="{1B7A265A-1B45-4C98-8243-E4A665A2A2EB}"/>
+              </a:ext>
+            </a:extLst>
+          </p:cNvPr>
+          <p:cNvSpPr>
+            <a:spLocks xmlns:a="http://schemas.openxmlformats.org/drawingml/2006/main" noGrp="1"/>
+          </p:cNvSpPr>
+          <p:nvPr/>
+        </p:nvSpPr>
+        <p:spPr>
+          <a:xfrm xmlns:a="http://schemas.openxmlformats.org/drawingml/2006/main">
+            <a:off x="1714500" y="4743450"/>
+            <a:ext cx="9525000" cy="809625"/>
           </a:xfrm>
           <a:prstGeom xmlns:a="http://schemas.openxmlformats.org/drawingml/2006/main" prst="rect">
             <a:avLst/>
@@ -8815,7 +8823,7 @@
           <a:lstStyle xmlns:a="http://schemas.openxmlformats.org/drawingml/2006/main"/>
           <a:p xmlns:a="http://schemas.openxmlformats.org/drawingml/2006/main">
             <a:pPr algn="l">
-              <a:defRPr sz="1500" b="1">
+              <a:defRPr sz="1725" b="1">
                 <a:solidFill>
                   <a:srgbClr val="2F785D"/>
                 </a:solidFill>
@@ -8825,7 +8833,7 @@
               </a:defRPr>
             </a:pPr>
             <a:r>
-              <a:rPr sz="1500" b="1">
+              <a:rPr sz="1725" b="1">
                 <a:solidFill>
                   <a:srgbClr val="2F785D"/>
                 </a:solidFill>
@@ -8833,7 +8841,7 @@
                 <a:ea typeface="Arial"/>
                 <a:cs typeface="Arial"/>
               </a:rPr>
-              <a:t>Check the result: State the answer in context and check it against the data range.</a:t>
+              <a:t>Mean = 75 ÷ 5 = 15</a:t>
             </a:r>
           </a:p>
         </p:txBody>
@@ -8841,7 +8849,7 @@
     </p:spTree>
     <p:extLst>
       <p:ext uri="{BB962C8B-B14F-4D97-AF65-F5344CB8AC3E}">
-        <p14:creationId xmlns:p14="http://schemas.microsoft.com/office/powerpoint/2010/main" val="560341146"/>
+        <p14:creationId xmlns:p14="http://schemas.microsoft.com/office/powerpoint/2010/main" val="1347272710"/>
       </p:ext>
     </p:extLst>
   </p:cSld>
@@ -9134,7 +9142,7 @@
           <p:cNvPr id="15" name="">
             <a:extLst xmlns:a="http://schemas.openxmlformats.org/drawingml/2006/main">
               <a:ext uri="{FF2B5EF4-FFF2-40B4-BE49-F238E27FC236}">
-                <a16:creationId xmlns:a16="http://schemas.microsoft.com/office/drawing/2014/main" id="{938C8185-6CA6-4B06-BAFC-71DF4A86133B}"/>
+                <a16:creationId xmlns:a16="http://schemas.microsoft.com/office/drawing/2014/main" id="{512D04D6-662F-454A-9264-E6ACD95B2F88}"/>
               </a:ext>
             </a:extLst>
           </p:cNvPr>
@@ -9166,7 +9174,7 @@
           <p:cNvPr id="2" name="">
             <a:extLst xmlns:a="http://schemas.openxmlformats.org/drawingml/2006/main">
               <a:ext uri="{FF2B5EF4-FFF2-40B4-BE49-F238E27FC236}">
-                <a16:creationId xmlns:a16="http://schemas.microsoft.com/office/drawing/2014/main" id="{8EDF3F43-24B7-4FFB-88CD-E86190F56055}"/>
+                <a16:creationId xmlns:a16="http://schemas.microsoft.com/office/drawing/2014/main" id="{00C65C95-8AC2-4214-8B39-8E6A9EF81366}"/>
               </a:ext>
             </a:extLst>
           </p:cNvPr>
@@ -9223,7 +9231,7 @@
           <p:cNvPr id="3" name="">
             <a:extLst xmlns:a="http://schemas.openxmlformats.org/drawingml/2006/main">
               <a:ext uri="{FF2B5EF4-FFF2-40B4-BE49-F238E27FC236}">
-                <a16:creationId xmlns:a16="http://schemas.microsoft.com/office/drawing/2014/main" id="{FE4456D0-6308-4EB5-BC34-94F29C51D091}"/>
+                <a16:creationId xmlns:a16="http://schemas.microsoft.com/office/drawing/2014/main" id="{E9987770-5C8E-46E3-8702-0B493B16E62F}"/>
               </a:ext>
             </a:extLst>
           </p:cNvPr>
@@ -9255,7 +9263,7 @@
           <p:cNvPr id="4" name="">
             <a:extLst xmlns:a="http://schemas.openxmlformats.org/drawingml/2006/main">
               <a:ext uri="{FF2B5EF4-FFF2-40B4-BE49-F238E27FC236}">
-                <a16:creationId xmlns:a16="http://schemas.microsoft.com/office/drawing/2014/main" id="{1EE8E3FB-3D53-44A1-85C6-D81CF5F74774}"/>
+                <a16:creationId xmlns:a16="http://schemas.microsoft.com/office/drawing/2014/main" id="{B3DBA06A-865F-4FD6-B57E-66BE57288261}"/>
               </a:ext>
             </a:extLst>
           </p:cNvPr>
@@ -9312,7 +9320,7 @@
           <p:cNvPr id="5" name="">
             <a:extLst xmlns:a="http://schemas.openxmlformats.org/drawingml/2006/main">
               <a:ext uri="{FF2B5EF4-FFF2-40B4-BE49-F238E27FC236}">
-                <a16:creationId xmlns:a16="http://schemas.microsoft.com/office/drawing/2014/main" id="{EFDC8CA2-69A6-4F78-91E3-CB74CC7B6322}"/>
+                <a16:creationId xmlns:a16="http://schemas.microsoft.com/office/drawing/2014/main" id="{B684BC5C-9261-4895-A3BA-A254F74D4D8F}"/>
               </a:ext>
             </a:extLst>
           </p:cNvPr>
@@ -9369,7 +9377,7 @@
           <p:cNvPr id="6" name="">
             <a:extLst xmlns:a="http://schemas.openxmlformats.org/drawingml/2006/main">
               <a:ext uri="{FF2B5EF4-FFF2-40B4-BE49-F238E27FC236}">
-                <a16:creationId xmlns:a16="http://schemas.microsoft.com/office/drawing/2014/main" id="{9DEF33EA-759C-415A-B28E-5E6B86D3A928}"/>
+                <a16:creationId xmlns:a16="http://schemas.microsoft.com/office/drawing/2014/main" id="{F102944D-1DCD-48CE-9F8E-BE82D7A34176}"/>
               </a:ext>
             </a:extLst>
           </p:cNvPr>
@@ -9426,7 +9434,7 @@
           <p:cNvPr id="7" name="">
             <a:extLst xmlns:a="http://schemas.openxmlformats.org/drawingml/2006/main">
               <a:ext uri="{FF2B5EF4-FFF2-40B4-BE49-F238E27FC236}">
-                <a16:creationId xmlns:a16="http://schemas.microsoft.com/office/drawing/2014/main" id="{F9A5A1B2-E113-4141-A05A-F7FC6A014AA1}"/>
+                <a16:creationId xmlns:a16="http://schemas.microsoft.com/office/drawing/2014/main" id="{55FDB619-39DA-4255-B9C0-CA17D707CC9F}"/>
               </a:ext>
             </a:extLst>
           </p:cNvPr>
@@ -9458,7 +9466,7 @@
           <p:cNvPr id="8" name="">
             <a:extLst xmlns:a="http://schemas.openxmlformats.org/drawingml/2006/main">
               <a:ext uri="{FF2B5EF4-FFF2-40B4-BE49-F238E27FC236}">
-                <a16:creationId xmlns:a16="http://schemas.microsoft.com/office/drawing/2014/main" id="{3BA4567B-A9C1-4E75-B585-DD0561B8628A}"/>
+                <a16:creationId xmlns:a16="http://schemas.microsoft.com/office/drawing/2014/main" id="{D1D6684E-CB59-4F22-8837-D446370C402A}"/>
               </a:ext>
             </a:extLst>
           </p:cNvPr>
@@ -9515,7 +9523,7 @@
           <p:cNvPr id="9" name="">
             <a:extLst xmlns:a="http://schemas.openxmlformats.org/drawingml/2006/main">
               <a:ext uri="{FF2B5EF4-FFF2-40B4-BE49-F238E27FC236}">
-                <a16:creationId xmlns:a16="http://schemas.microsoft.com/office/drawing/2014/main" id="{291A792B-05D2-4B8D-A83D-DFF782A8F1E0}"/>
+                <a16:creationId xmlns:a16="http://schemas.microsoft.com/office/drawing/2014/main" id="{0C109D07-3512-4BCF-8B17-9243E52C19E5}"/>
               </a:ext>
             </a:extLst>
           </p:cNvPr>
@@ -9572,7 +9580,7 @@
           <p:cNvPr id="10" name="">
             <a:extLst xmlns:a="http://schemas.openxmlformats.org/drawingml/2006/main">
               <a:ext uri="{FF2B5EF4-FFF2-40B4-BE49-F238E27FC236}">
-                <a16:creationId xmlns:a16="http://schemas.microsoft.com/office/drawing/2014/main" id="{8C39CEFF-764B-4780-9677-EB63B430A2FD}"/>
+                <a16:creationId xmlns:a16="http://schemas.microsoft.com/office/drawing/2014/main" id="{5898FDC0-F5F2-4579-A70E-8D8DF1F6C411}"/>
               </a:ext>
             </a:extLst>
           </p:cNvPr>
@@ -9629,7 +9637,7 @@
           <p:cNvPr id="11" name="">
             <a:extLst xmlns:a="http://schemas.openxmlformats.org/drawingml/2006/main">
               <a:ext uri="{FF2B5EF4-FFF2-40B4-BE49-F238E27FC236}">
-                <a16:creationId xmlns:a16="http://schemas.microsoft.com/office/drawing/2014/main" id="{020FFEDA-4C44-4643-AD33-36F146C9F323}"/>
+                <a16:creationId xmlns:a16="http://schemas.microsoft.com/office/drawing/2014/main" id="{2B51E1BB-7992-436C-B89F-1A1CE20B16FC}"/>
               </a:ext>
             </a:extLst>
           </p:cNvPr>
@@ -9686,7 +9694,7 @@
           <p:cNvPr id="12" name="">
             <a:extLst xmlns:a="http://schemas.openxmlformats.org/drawingml/2006/main">
               <a:ext uri="{FF2B5EF4-FFF2-40B4-BE49-F238E27FC236}">
-                <a16:creationId xmlns:a16="http://schemas.microsoft.com/office/drawing/2014/main" id="{0783C89C-3609-4A47-A1E2-8DFB21C8BA4F}"/>
+                <a16:creationId xmlns:a16="http://schemas.microsoft.com/office/drawing/2014/main" id="{5CBE0E51-5C60-4150-BF5B-39F38B60AA60}"/>
               </a:ext>
             </a:extLst>
           </p:cNvPr>
@@ -9718,7 +9726,7 @@
           <p:cNvPr id="13" name="">
             <a:extLst xmlns:a="http://schemas.openxmlformats.org/drawingml/2006/main">
               <a:ext uri="{FF2B5EF4-FFF2-40B4-BE49-F238E27FC236}">
-                <a16:creationId xmlns:a16="http://schemas.microsoft.com/office/drawing/2014/main" id="{53CC6A7E-E117-4C36-AF32-7D8EC8215660}"/>
+                <a16:creationId xmlns:a16="http://schemas.microsoft.com/office/drawing/2014/main" id="{B91701D5-8139-492F-AB01-354175C99B36}"/>
               </a:ext>
             </a:extLst>
           </p:cNvPr>
@@ -9775,7 +9783,7 @@
           <p:cNvPr id="14" name="">
             <a:extLst xmlns:a="http://schemas.openxmlformats.org/drawingml/2006/main">
               <a:ext uri="{FF2B5EF4-FFF2-40B4-BE49-F238E27FC236}">
-                <a16:creationId xmlns:a16="http://schemas.microsoft.com/office/drawing/2014/main" id="{66CCADFC-3152-4D0D-8FD8-9F4F10E9A07F}"/>
+                <a16:creationId xmlns:a16="http://schemas.microsoft.com/office/drawing/2014/main" id="{D4738876-2FDC-4363-AC62-2624CFB7D432}"/>
               </a:ext>
             </a:extLst>
           </p:cNvPr>
@@ -9830,7 +9838,7 @@
     </p:spTree>
     <p:extLst>
       <p:ext uri="{BB962C8B-B14F-4D97-AF65-F5344CB8AC3E}">
-        <p14:creationId xmlns:p14="http://schemas.microsoft.com/office/powerpoint/2010/main" val="1268386596"/>
+        <p14:creationId xmlns:p14="http://schemas.microsoft.com/office/powerpoint/2010/main" val="620271726"/>
       </p:ext>
     </p:extLst>
   </p:cSld>
@@ -10031,7 +10039,7 @@
           <p:cNvPr id="16" name="">
             <a:extLst xmlns:a="http://schemas.openxmlformats.org/drawingml/2006/main">
               <a:ext uri="{FF2B5EF4-FFF2-40B4-BE49-F238E27FC236}">
-                <a16:creationId xmlns:a16="http://schemas.microsoft.com/office/drawing/2014/main" id="{C8FDCFD0-9B06-45D9-8329-7C983BAE660F}"/>
+                <a16:creationId xmlns:a16="http://schemas.microsoft.com/office/drawing/2014/main" id="{E5F9F17B-4C0D-4E80-B15D-164642A459CA}"/>
               </a:ext>
             </a:extLst>
           </p:cNvPr>
@@ -10063,7 +10071,7 @@
           <p:cNvPr id="2" name="">
             <a:extLst xmlns:a="http://schemas.openxmlformats.org/drawingml/2006/main">
               <a:ext uri="{FF2B5EF4-FFF2-40B4-BE49-F238E27FC236}">
-                <a16:creationId xmlns:a16="http://schemas.microsoft.com/office/drawing/2014/main" id="{8055A3CE-3BD3-4CF3-82D9-5F12D6CC187D}"/>
+                <a16:creationId xmlns:a16="http://schemas.microsoft.com/office/drawing/2014/main" id="{1861CB48-4B35-4DE9-8C15-03A258AC7C51}"/>
               </a:ext>
             </a:extLst>
           </p:cNvPr>
@@ -10120,7 +10128,7 @@
           <p:cNvPr id="3" name="">
             <a:extLst xmlns:a="http://schemas.openxmlformats.org/drawingml/2006/main">
               <a:ext uri="{FF2B5EF4-FFF2-40B4-BE49-F238E27FC236}">
-                <a16:creationId xmlns:a16="http://schemas.microsoft.com/office/drawing/2014/main" id="{0924C84B-1BBA-47AB-9D06-4D44AC90CFDB}"/>
+                <a16:creationId xmlns:a16="http://schemas.microsoft.com/office/drawing/2014/main" id="{07764DFE-83CA-4E8B-B081-4C6A38A33548}"/>
               </a:ext>
             </a:extLst>
           </p:cNvPr>
@@ -10152,7 +10160,7 @@
           <p:cNvPr id="4" name="">
             <a:extLst xmlns:a="http://schemas.openxmlformats.org/drawingml/2006/main">
               <a:ext uri="{FF2B5EF4-FFF2-40B4-BE49-F238E27FC236}">
-                <a16:creationId xmlns:a16="http://schemas.microsoft.com/office/drawing/2014/main" id="{16246176-39BF-410A-8B94-D6EF5DE7CE18}"/>
+                <a16:creationId xmlns:a16="http://schemas.microsoft.com/office/drawing/2014/main" id="{49DFA1EF-F5EF-436F-AD34-AD497733AE98}"/>
               </a:ext>
             </a:extLst>
           </p:cNvPr>
@@ -10209,7 +10217,7 @@
           <p:cNvPr id="5" name="">
             <a:extLst xmlns:a="http://schemas.openxmlformats.org/drawingml/2006/main">
               <a:ext uri="{FF2B5EF4-FFF2-40B4-BE49-F238E27FC236}">
-                <a16:creationId xmlns:a16="http://schemas.microsoft.com/office/drawing/2014/main" id="{2D1684DE-1BA1-4034-8C46-123C0BF8300D}"/>
+                <a16:creationId xmlns:a16="http://schemas.microsoft.com/office/drawing/2014/main" id="{0276CF88-89D4-46E2-94DC-B6793EDAA976}"/>
               </a:ext>
             </a:extLst>
           </p:cNvPr>
@@ -10266,7 +10274,7 @@
           <p:cNvPr id="6" name="">
             <a:extLst xmlns:a="http://schemas.openxmlformats.org/drawingml/2006/main">
               <a:ext uri="{FF2B5EF4-FFF2-40B4-BE49-F238E27FC236}">
-                <a16:creationId xmlns:a16="http://schemas.microsoft.com/office/drawing/2014/main" id="{4D36D5FF-95DA-435B-8393-1F6309236402}"/>
+                <a16:creationId xmlns:a16="http://schemas.microsoft.com/office/drawing/2014/main" id="{9680AFDF-4BAB-4069-BE82-B86F7A294BE4}"/>
               </a:ext>
             </a:extLst>
           </p:cNvPr>
@@ -10323,7 +10331,7 @@
           <p:cNvPr id="7" name="">
             <a:extLst xmlns:a="http://schemas.openxmlformats.org/drawingml/2006/main">
               <a:ext uri="{FF2B5EF4-FFF2-40B4-BE49-F238E27FC236}">
-                <a16:creationId xmlns:a16="http://schemas.microsoft.com/office/drawing/2014/main" id="{8DB388E9-9B11-4273-A57D-9E61DDB27ABE}"/>
+                <a16:creationId xmlns:a16="http://schemas.microsoft.com/office/drawing/2014/main" id="{0E7F6AEE-E1F6-42E0-94D6-5770B25590BC}"/>
               </a:ext>
             </a:extLst>
           </p:cNvPr>
@@ -10355,7 +10363,7 @@
           <p:cNvPr id="8" name="">
             <a:extLst xmlns:a="http://schemas.openxmlformats.org/drawingml/2006/main">
               <a:ext uri="{FF2B5EF4-FFF2-40B4-BE49-F238E27FC236}">
-                <a16:creationId xmlns:a16="http://schemas.microsoft.com/office/drawing/2014/main" id="{FDABB0BD-F9CC-423E-8842-A38BD8885D37}"/>
+                <a16:creationId xmlns:a16="http://schemas.microsoft.com/office/drawing/2014/main" id="{6EF3EAA5-85F7-4E29-9539-0CE9D6DB5623}"/>
               </a:ext>
             </a:extLst>
           </p:cNvPr>
@@ -10412,7 +10420,7 @@
           <p:cNvPr id="9" name="">
             <a:extLst xmlns:a="http://schemas.openxmlformats.org/drawingml/2006/main">
               <a:ext uri="{FF2B5EF4-FFF2-40B4-BE49-F238E27FC236}">
-                <a16:creationId xmlns:a16="http://schemas.microsoft.com/office/drawing/2014/main" id="{583607EC-2E60-4416-AE37-5A0CCD57EE4F}"/>
+                <a16:creationId xmlns:a16="http://schemas.microsoft.com/office/drawing/2014/main" id="{B0C204D6-B300-4755-B813-4DF4CA3881BE}"/>
               </a:ext>
             </a:extLst>
           </p:cNvPr>
@@ -10469,7 +10477,7 @@
           <p:cNvPr id="10" name="">
             <a:extLst xmlns:a="http://schemas.openxmlformats.org/drawingml/2006/main">
               <a:ext uri="{FF2B5EF4-FFF2-40B4-BE49-F238E27FC236}">
-                <a16:creationId xmlns:a16="http://schemas.microsoft.com/office/drawing/2014/main" id="{A40A5746-B886-444E-A9B6-EA2A61F03B67}"/>
+                <a16:creationId xmlns:a16="http://schemas.microsoft.com/office/drawing/2014/main" id="{5DC8557A-9E6A-437E-82DA-0D91079D2EC9}"/>
               </a:ext>
             </a:extLst>
           </p:cNvPr>
@@ -10526,7 +10534,7 @@
           <p:cNvPr id="11" name="">
             <a:extLst xmlns:a="http://schemas.openxmlformats.org/drawingml/2006/main">
               <a:ext uri="{FF2B5EF4-FFF2-40B4-BE49-F238E27FC236}">
-                <a16:creationId xmlns:a16="http://schemas.microsoft.com/office/drawing/2014/main" id="{93653B41-FC90-4E95-8629-F9C6689E23D3}"/>
+                <a16:creationId xmlns:a16="http://schemas.microsoft.com/office/drawing/2014/main" id="{DC12129D-8791-417B-A399-0A9ADEA73FAA}"/>
               </a:ext>
             </a:extLst>
           </p:cNvPr>
@@ -10583,7 +10591,7 @@
           <p:cNvPr id="12" name="">
             <a:extLst xmlns:a="http://schemas.openxmlformats.org/drawingml/2006/main">
               <a:ext uri="{FF2B5EF4-FFF2-40B4-BE49-F238E27FC236}">
-                <a16:creationId xmlns:a16="http://schemas.microsoft.com/office/drawing/2014/main" id="{4059E161-8290-45C8-95C9-0A19916E5790}"/>
+                <a16:creationId xmlns:a16="http://schemas.microsoft.com/office/drawing/2014/main" id="{327BA00B-9775-4A8E-A00D-459E7685A09C}"/>
               </a:ext>
             </a:extLst>
           </p:cNvPr>
@@ -10640,7 +10648,7 @@
           <p:cNvPr id="13" name="">
             <a:extLst xmlns:a="http://schemas.openxmlformats.org/drawingml/2006/main">
               <a:ext uri="{FF2B5EF4-FFF2-40B4-BE49-F238E27FC236}">
-                <a16:creationId xmlns:a16="http://schemas.microsoft.com/office/drawing/2014/main" id="{45B312B6-7C20-43F6-AE62-56E043F53510}"/>
+                <a16:creationId xmlns:a16="http://schemas.microsoft.com/office/drawing/2014/main" id="{EA9E58E9-BC34-40F5-8164-9DBA056B24E8}"/>
               </a:ext>
             </a:extLst>
           </p:cNvPr>
@@ -10697,7 +10705,7 @@
           <p:cNvPr id="14" name="">
             <a:extLst xmlns:a="http://schemas.openxmlformats.org/drawingml/2006/main">
               <a:ext uri="{FF2B5EF4-FFF2-40B4-BE49-F238E27FC236}">
-                <a16:creationId xmlns:a16="http://schemas.microsoft.com/office/drawing/2014/main" id="{529C7073-B8DC-4C7C-B7F1-694F93658E47}"/>
+                <a16:creationId xmlns:a16="http://schemas.microsoft.com/office/drawing/2014/main" id="{4E880CE4-0ABB-4652-BD38-72DF2AFAA541}"/>
               </a:ext>
             </a:extLst>
           </p:cNvPr>
@@ -10754,7 +10762,7 @@
           <p:cNvPr id="15" name="">
             <a:extLst xmlns:a="http://schemas.openxmlformats.org/drawingml/2006/main">
               <a:ext uri="{FF2B5EF4-FFF2-40B4-BE49-F238E27FC236}">
-                <a16:creationId xmlns:a16="http://schemas.microsoft.com/office/drawing/2014/main" id="{D55E2D7B-605D-493F-98D7-2C2263C82AC2}"/>
+                <a16:creationId xmlns:a16="http://schemas.microsoft.com/office/drawing/2014/main" id="{D20371B3-1AE9-4D77-BFBB-5583D157ABD0}"/>
               </a:ext>
             </a:extLst>
           </p:cNvPr>
@@ -10809,7 +10817,7 @@
     </p:spTree>
     <p:extLst>
       <p:ext uri="{BB962C8B-B14F-4D97-AF65-F5344CB8AC3E}">
-        <p14:creationId xmlns:p14="http://schemas.microsoft.com/office/powerpoint/2010/main" val="949411236"/>
+        <p14:creationId xmlns:p14="http://schemas.microsoft.com/office/powerpoint/2010/main" val="414572247"/>
       </p:ext>
     </p:extLst>
   </p:cSld>
@@ -10964,7 +10972,7 @@
           <p:cNvPr id="16" name="">
             <a:extLst xmlns:a="http://schemas.openxmlformats.org/drawingml/2006/main">
               <a:ext uri="{FF2B5EF4-FFF2-40B4-BE49-F238E27FC236}">
-                <a16:creationId xmlns:a16="http://schemas.microsoft.com/office/drawing/2014/main" id="{7CBCA4C1-E70B-45AD-9193-4C9819C913B6}"/>
+                <a16:creationId xmlns:a16="http://schemas.microsoft.com/office/drawing/2014/main" id="{7ADBA913-FAFD-4234-932B-22C6E4E6486B}"/>
               </a:ext>
             </a:extLst>
           </p:cNvPr>
@@ -10996,7 +11004,7 @@
           <p:cNvPr id="2" name="">
             <a:extLst xmlns:a="http://schemas.openxmlformats.org/drawingml/2006/main">
               <a:ext uri="{FF2B5EF4-FFF2-40B4-BE49-F238E27FC236}">
-                <a16:creationId xmlns:a16="http://schemas.microsoft.com/office/drawing/2014/main" id="{F04934B4-09D1-4209-AE78-A33190534608}"/>
+                <a16:creationId xmlns:a16="http://schemas.microsoft.com/office/drawing/2014/main" id="{F81F2C86-0B78-4653-9F63-6814F7F3140E}"/>
               </a:ext>
             </a:extLst>
           </p:cNvPr>
@@ -11053,7 +11061,7 @@
           <p:cNvPr id="3" name="">
             <a:extLst xmlns:a="http://schemas.openxmlformats.org/drawingml/2006/main">
               <a:ext uri="{FF2B5EF4-FFF2-40B4-BE49-F238E27FC236}">
-                <a16:creationId xmlns:a16="http://schemas.microsoft.com/office/drawing/2014/main" id="{845CF570-7171-40C7-B3D8-B9C1E2AF3EA8}"/>
+                <a16:creationId xmlns:a16="http://schemas.microsoft.com/office/drawing/2014/main" id="{321B02E1-368A-4BE8-9052-26E9721972AD}"/>
               </a:ext>
             </a:extLst>
           </p:cNvPr>
@@ -11085,7 +11093,7 @@
           <p:cNvPr id="4" name="">
             <a:extLst xmlns:a="http://schemas.openxmlformats.org/drawingml/2006/main">
               <a:ext uri="{FF2B5EF4-FFF2-40B4-BE49-F238E27FC236}">
-                <a16:creationId xmlns:a16="http://schemas.microsoft.com/office/drawing/2014/main" id="{BA811FCF-C52B-4510-A1DF-99BC5DDE6DE2}"/>
+                <a16:creationId xmlns:a16="http://schemas.microsoft.com/office/drawing/2014/main" id="{0444EE87-CB36-40DD-B57B-912A36FF4ED0}"/>
               </a:ext>
             </a:extLst>
           </p:cNvPr>
@@ -11142,7 +11150,7 @@
           <p:cNvPr id="5" name="">
             <a:extLst xmlns:a="http://schemas.openxmlformats.org/drawingml/2006/main">
               <a:ext uri="{FF2B5EF4-FFF2-40B4-BE49-F238E27FC236}">
-                <a16:creationId xmlns:a16="http://schemas.microsoft.com/office/drawing/2014/main" id="{9BB18F61-ABB3-436C-8F9A-09E9D9E33EFC}"/>
+                <a16:creationId xmlns:a16="http://schemas.microsoft.com/office/drawing/2014/main" id="{95F1AC42-9E49-4BED-95C1-7A51BAC668D9}"/>
               </a:ext>
             </a:extLst>
           </p:cNvPr>
@@ -11199,7 +11207,7 @@
           <p:cNvPr id="6" name="">
             <a:extLst xmlns:a="http://schemas.openxmlformats.org/drawingml/2006/main">
               <a:ext uri="{FF2B5EF4-FFF2-40B4-BE49-F238E27FC236}">
-                <a16:creationId xmlns:a16="http://schemas.microsoft.com/office/drawing/2014/main" id="{619A6906-5F9D-41AA-9F24-2E7C1962AEE4}"/>
+                <a16:creationId xmlns:a16="http://schemas.microsoft.com/office/drawing/2014/main" id="{51C45B2D-7521-491A-A6EE-F47EF49CB37E}"/>
               </a:ext>
             </a:extLst>
           </p:cNvPr>
@@ -11256,7 +11264,7 @@
           <p:cNvPr id="7" name="">
             <a:extLst xmlns:a="http://schemas.openxmlformats.org/drawingml/2006/main">
               <a:ext uri="{FF2B5EF4-FFF2-40B4-BE49-F238E27FC236}">
-                <a16:creationId xmlns:a16="http://schemas.microsoft.com/office/drawing/2014/main" id="{B91A80F2-D044-417D-ACFE-13B3C059D9D7}"/>
+                <a16:creationId xmlns:a16="http://schemas.microsoft.com/office/drawing/2014/main" id="{713AD0C2-BCA7-4956-9E97-6E2C7C1A37C3}"/>
               </a:ext>
             </a:extLst>
           </p:cNvPr>
@@ -11288,7 +11296,7 @@
           <p:cNvPr id="8" name="">
             <a:extLst xmlns:a="http://schemas.openxmlformats.org/drawingml/2006/main">
               <a:ext uri="{FF2B5EF4-FFF2-40B4-BE49-F238E27FC236}">
-                <a16:creationId xmlns:a16="http://schemas.microsoft.com/office/drawing/2014/main" id="{0C339FA2-7DA1-481A-859D-71A384FC9B14}"/>
+                <a16:creationId xmlns:a16="http://schemas.microsoft.com/office/drawing/2014/main" id="{4FB8B004-0DC2-44AF-8641-1056B5B78AA6}"/>
               </a:ext>
             </a:extLst>
           </p:cNvPr>
@@ -11345,7 +11353,7 @@
           <p:cNvPr id="9" name="">
             <a:extLst xmlns:a="http://schemas.openxmlformats.org/drawingml/2006/main">
               <a:ext uri="{FF2B5EF4-FFF2-40B4-BE49-F238E27FC236}">
-                <a16:creationId xmlns:a16="http://schemas.microsoft.com/office/drawing/2014/main" id="{483842FE-6952-43A7-98BE-43BF35D8FC1B}"/>
+                <a16:creationId xmlns:a16="http://schemas.microsoft.com/office/drawing/2014/main" id="{4D94FF67-FDE7-45DA-BAB4-4D83039979A1}"/>
               </a:ext>
             </a:extLst>
           </p:cNvPr>
@@ -11406,7 +11414,7 @@
           <p:nvPr/>
         </p:nvPicPr>
         <p:blipFill>
-          <a:blip xmlns:r="http://schemas.openxmlformats.org/officeDocument/2006/relationships" xmlns:a="http://schemas.openxmlformats.org/drawingml/2006/main" r:embed="Rf538757eeef04ded"/>
+          <a:blip xmlns:r="http://schemas.openxmlformats.org/officeDocument/2006/relationships" xmlns:a="http://schemas.openxmlformats.org/drawingml/2006/main" r:embed="R8c46f355bd6b44c9"/>
           <a:stretch xmlns:a="http://schemas.openxmlformats.org/drawingml/2006/main"/>
         </p:blipFill>
         <p:spPr>
@@ -11424,7 +11432,7 @@
           <p:cNvPr id="11" name="">
             <a:extLst xmlns:a="http://schemas.openxmlformats.org/drawingml/2006/main">
               <a:ext uri="{FF2B5EF4-FFF2-40B4-BE49-F238E27FC236}">
-                <a16:creationId xmlns:a16="http://schemas.microsoft.com/office/drawing/2014/main" id="{E04CE58A-E885-4290-B46C-83F3D6B41F06}"/>
+                <a16:creationId xmlns:a16="http://schemas.microsoft.com/office/drawing/2014/main" id="{EBDC0721-78A3-4C7A-86C7-E45CC42BCFFA}"/>
               </a:ext>
             </a:extLst>
           </p:cNvPr>
@@ -11481,7 +11489,7 @@
           <p:cNvPr id="12" name="">
             <a:extLst xmlns:a="http://schemas.openxmlformats.org/drawingml/2006/main">
               <a:ext uri="{FF2B5EF4-FFF2-40B4-BE49-F238E27FC236}">
-                <a16:creationId xmlns:a16="http://schemas.microsoft.com/office/drawing/2014/main" id="{FF27AFBC-D675-4ED2-B540-1B021A129B2C}"/>
+                <a16:creationId xmlns:a16="http://schemas.microsoft.com/office/drawing/2014/main" id="{32EC8FAD-2CE6-4D36-B647-50EBF17075CE}"/>
               </a:ext>
             </a:extLst>
           </p:cNvPr>
@@ -11538,7 +11546,7 @@
           <p:cNvPr id="13" name="">
             <a:extLst xmlns:a="http://schemas.openxmlformats.org/drawingml/2006/main">
               <a:ext uri="{FF2B5EF4-FFF2-40B4-BE49-F238E27FC236}">
-                <a16:creationId xmlns:a16="http://schemas.microsoft.com/office/drawing/2014/main" id="{84B19463-4428-4A8F-98C5-4D09D1D285F6}"/>
+                <a16:creationId xmlns:a16="http://schemas.microsoft.com/office/drawing/2014/main" id="{6C1CBC51-739E-4700-97AD-68F72C64902C}"/>
               </a:ext>
             </a:extLst>
           </p:cNvPr>
@@ -11570,7 +11578,7 @@
           <p:cNvPr id="14" name="">
             <a:extLst xmlns:a="http://schemas.openxmlformats.org/drawingml/2006/main">
               <a:ext uri="{FF2B5EF4-FFF2-40B4-BE49-F238E27FC236}">
-                <a16:creationId xmlns:a16="http://schemas.microsoft.com/office/drawing/2014/main" id="{A6F5D14E-C901-43DD-81FC-46C9D50D0353}"/>
+                <a16:creationId xmlns:a16="http://schemas.microsoft.com/office/drawing/2014/main" id="{2E842F42-FCC9-4532-B728-C11DA3697D7D}"/>
               </a:ext>
             </a:extLst>
           </p:cNvPr>
@@ -11627,7 +11635,7 @@
           <p:cNvPr id="15" name="">
             <a:extLst xmlns:a="http://schemas.openxmlformats.org/drawingml/2006/main">
               <a:ext uri="{FF2B5EF4-FFF2-40B4-BE49-F238E27FC236}">
-                <a16:creationId xmlns:a16="http://schemas.microsoft.com/office/drawing/2014/main" id="{00C5A6AE-F808-4889-A8BB-584E006685B3}"/>
+                <a16:creationId xmlns:a16="http://schemas.microsoft.com/office/drawing/2014/main" id="{5F66E3C5-E522-4F91-A71A-48DA7D16B084}"/>
               </a:ext>
             </a:extLst>
           </p:cNvPr>
@@ -11682,7 +11690,7 @@
     </p:spTree>
     <p:extLst>
       <p:ext uri="{BB962C8B-B14F-4D97-AF65-F5344CB8AC3E}">
-        <p14:creationId xmlns:p14="http://schemas.microsoft.com/office/powerpoint/2010/main" val="431592149"/>
+        <p14:creationId xmlns:p14="http://schemas.microsoft.com/office/powerpoint/2010/main" val="1910678426"/>
       </p:ext>
     </p:extLst>
   </p:cSld>
@@ -11837,7 +11845,7 @@
           <p:cNvPr id="23" name="">
             <a:extLst xmlns:a="http://schemas.openxmlformats.org/drawingml/2006/main">
               <a:ext uri="{FF2B5EF4-FFF2-40B4-BE49-F238E27FC236}">
-                <a16:creationId xmlns:a16="http://schemas.microsoft.com/office/drawing/2014/main" id="{223F08AB-20D2-4606-92FE-561C71872541}"/>
+                <a16:creationId xmlns:a16="http://schemas.microsoft.com/office/drawing/2014/main" id="{3DCFF30B-1B49-416F-ABDC-8D02D0B9E005}"/>
               </a:ext>
             </a:extLst>
           </p:cNvPr>
@@ -11869,7 +11877,7 @@
           <p:cNvPr id="2" name="">
             <a:extLst xmlns:a="http://schemas.openxmlformats.org/drawingml/2006/main">
               <a:ext uri="{FF2B5EF4-FFF2-40B4-BE49-F238E27FC236}">
-                <a16:creationId xmlns:a16="http://schemas.microsoft.com/office/drawing/2014/main" id="{A95D7075-62BE-480C-9841-4A3EC9F674D0}"/>
+                <a16:creationId xmlns:a16="http://schemas.microsoft.com/office/drawing/2014/main" id="{1C397E83-EAF2-47B1-8428-DD8E631BE038}"/>
               </a:ext>
             </a:extLst>
           </p:cNvPr>
@@ -11926,7 +11934,7 @@
           <p:cNvPr id="3" name="">
             <a:extLst xmlns:a="http://schemas.openxmlformats.org/drawingml/2006/main">
               <a:ext uri="{FF2B5EF4-FFF2-40B4-BE49-F238E27FC236}">
-                <a16:creationId xmlns:a16="http://schemas.microsoft.com/office/drawing/2014/main" id="{504124B5-7548-4E7D-B28C-551AA2E4F60B}"/>
+                <a16:creationId xmlns:a16="http://schemas.microsoft.com/office/drawing/2014/main" id="{E6A2E85E-58FA-482B-9F54-67C2D05B8129}"/>
               </a:ext>
             </a:extLst>
           </p:cNvPr>
@@ -11958,7 +11966,7 @@
           <p:cNvPr id="4" name="">
             <a:extLst xmlns:a="http://schemas.openxmlformats.org/drawingml/2006/main">
               <a:ext uri="{FF2B5EF4-FFF2-40B4-BE49-F238E27FC236}">
-                <a16:creationId xmlns:a16="http://schemas.microsoft.com/office/drawing/2014/main" id="{F1B1ABA5-717B-4E10-AE66-05E697E9D607}"/>
+                <a16:creationId xmlns:a16="http://schemas.microsoft.com/office/drawing/2014/main" id="{3D953964-25C9-4BC6-9CE5-68D3846EA118}"/>
               </a:ext>
             </a:extLst>
           </p:cNvPr>
@@ -12015,7 +12023,7 @@
           <p:cNvPr id="5" name="">
             <a:extLst xmlns:a="http://schemas.openxmlformats.org/drawingml/2006/main">
               <a:ext uri="{FF2B5EF4-FFF2-40B4-BE49-F238E27FC236}">
-                <a16:creationId xmlns:a16="http://schemas.microsoft.com/office/drawing/2014/main" id="{44FC7204-A1A4-4E49-B5B4-ACAF02EDDF89}"/>
+                <a16:creationId xmlns:a16="http://schemas.microsoft.com/office/drawing/2014/main" id="{481A8399-97B2-4280-80C3-0AB9BF30907E}"/>
               </a:ext>
             </a:extLst>
           </p:cNvPr>
@@ -12072,7 +12080,7 @@
           <p:cNvPr id="6" name="">
             <a:extLst xmlns:a="http://schemas.openxmlformats.org/drawingml/2006/main">
               <a:ext uri="{FF2B5EF4-FFF2-40B4-BE49-F238E27FC236}">
-                <a16:creationId xmlns:a16="http://schemas.microsoft.com/office/drawing/2014/main" id="{72B8AD8A-6FB2-4B7D-B9CF-F6A6A7CCC506}"/>
+                <a16:creationId xmlns:a16="http://schemas.microsoft.com/office/drawing/2014/main" id="{6DC0D91B-4060-43E6-93CD-D2BE5E7113FD}"/>
               </a:ext>
             </a:extLst>
           </p:cNvPr>
@@ -12129,7 +12137,7 @@
           <p:cNvPr id="7" name="">
             <a:extLst xmlns:a="http://schemas.openxmlformats.org/drawingml/2006/main">
               <a:ext uri="{FF2B5EF4-FFF2-40B4-BE49-F238E27FC236}">
-                <a16:creationId xmlns:a16="http://schemas.microsoft.com/office/drawing/2014/main" id="{92647550-E58F-402F-8EEC-65C92C17AD2B}"/>
+                <a16:creationId xmlns:a16="http://schemas.microsoft.com/office/drawing/2014/main" id="{4AAFA052-87FA-4D88-8286-89A60F976C88}"/>
               </a:ext>
             </a:extLst>
           </p:cNvPr>
@@ -12161,7 +12169,7 @@
           <p:cNvPr id="8" name="">
             <a:extLst xmlns:a="http://schemas.openxmlformats.org/drawingml/2006/main">
               <a:ext uri="{FF2B5EF4-FFF2-40B4-BE49-F238E27FC236}">
-                <a16:creationId xmlns:a16="http://schemas.microsoft.com/office/drawing/2014/main" id="{9A0E260F-56D3-4CBC-9A6C-6070BE65A8FA}"/>
+                <a16:creationId xmlns:a16="http://schemas.microsoft.com/office/drawing/2014/main" id="{625E0C29-CA87-47A1-A59E-07F8A257C6F5}"/>
               </a:ext>
             </a:extLst>
           </p:cNvPr>
@@ -12218,7 +12226,7 @@
           <p:cNvPr id="9" name="">
             <a:extLst xmlns:a="http://schemas.openxmlformats.org/drawingml/2006/main">
               <a:ext uri="{FF2B5EF4-FFF2-40B4-BE49-F238E27FC236}">
-                <a16:creationId xmlns:a16="http://schemas.microsoft.com/office/drawing/2014/main" id="{72A86292-22E7-41E7-A63C-43CB0F095129}"/>
+                <a16:creationId xmlns:a16="http://schemas.microsoft.com/office/drawing/2014/main" id="{53127543-B9FD-4BEF-8DD0-8F3D83785DDD}"/>
               </a:ext>
             </a:extLst>
           </p:cNvPr>
@@ -12275,7 +12283,7 @@
           <p:cNvPr id="10" name="">
             <a:extLst xmlns:a="http://schemas.openxmlformats.org/drawingml/2006/main">
               <a:ext uri="{FF2B5EF4-FFF2-40B4-BE49-F238E27FC236}">
-                <a16:creationId xmlns:a16="http://schemas.microsoft.com/office/drawing/2014/main" id="{063B89AF-A18D-46E4-8E0B-3570197ABC01}"/>
+                <a16:creationId xmlns:a16="http://schemas.microsoft.com/office/drawing/2014/main" id="{1510E43D-D38F-4381-AE16-8CB00A9A365B}"/>
               </a:ext>
             </a:extLst>
           </p:cNvPr>
@@ -12309,7 +12317,7 @@
           <p:cNvPr id="11" name="">
             <a:extLst xmlns:a="http://schemas.openxmlformats.org/drawingml/2006/main">
               <a:ext uri="{FF2B5EF4-FFF2-40B4-BE49-F238E27FC236}">
-                <a16:creationId xmlns:a16="http://schemas.microsoft.com/office/drawing/2014/main" id="{2DF53055-115E-43FE-B13D-89F022836CEC}"/>
+                <a16:creationId xmlns:a16="http://schemas.microsoft.com/office/drawing/2014/main" id="{38EE9CAC-6199-4575-B602-921D2D2C4102}"/>
               </a:ext>
             </a:extLst>
           </p:cNvPr>
@@ -12341,7 +12349,7 @@
           <p:cNvPr id="12" name="">
             <a:extLst xmlns:a="http://schemas.openxmlformats.org/drawingml/2006/main">
               <a:ext uri="{FF2B5EF4-FFF2-40B4-BE49-F238E27FC236}">
-                <a16:creationId xmlns:a16="http://schemas.microsoft.com/office/drawing/2014/main" id="{D55EAE37-2237-4F27-B40E-D55089EA904B}"/>
+                <a16:creationId xmlns:a16="http://schemas.microsoft.com/office/drawing/2014/main" id="{2EBAED82-4798-438C-90C6-607C23540482}"/>
               </a:ext>
             </a:extLst>
           </p:cNvPr>
@@ -12398,7 +12406,7 @@
           <p:cNvPr id="13" name="">
             <a:extLst xmlns:a="http://schemas.openxmlformats.org/drawingml/2006/main">
               <a:ext uri="{FF2B5EF4-FFF2-40B4-BE49-F238E27FC236}">
-                <a16:creationId xmlns:a16="http://schemas.microsoft.com/office/drawing/2014/main" id="{C95AB374-554A-4D4B-8073-CB50F76D39E2}"/>
+                <a16:creationId xmlns:a16="http://schemas.microsoft.com/office/drawing/2014/main" id="{C11C6626-D81C-4CCF-8626-7A24DC311888}"/>
               </a:ext>
             </a:extLst>
           </p:cNvPr>
@@ -12455,7 +12463,7 @@
           <p:cNvPr id="14" name="">
             <a:extLst xmlns:a="http://schemas.openxmlformats.org/drawingml/2006/main">
               <a:ext uri="{FF2B5EF4-FFF2-40B4-BE49-F238E27FC236}">
-                <a16:creationId xmlns:a16="http://schemas.microsoft.com/office/drawing/2014/main" id="{57987E61-A084-4886-8A79-3C9323BF448E}"/>
+                <a16:creationId xmlns:a16="http://schemas.microsoft.com/office/drawing/2014/main" id="{F829A106-9E40-417F-858C-A407D1196782}"/>
               </a:ext>
             </a:extLst>
           </p:cNvPr>
@@ -12489,7 +12497,7 @@
           <p:cNvPr id="15" name="">
             <a:extLst xmlns:a="http://schemas.openxmlformats.org/drawingml/2006/main">
               <a:ext uri="{FF2B5EF4-FFF2-40B4-BE49-F238E27FC236}">
-                <a16:creationId xmlns:a16="http://schemas.microsoft.com/office/drawing/2014/main" id="{E59D6A0B-9412-44F3-951C-A7929FF38111}"/>
+                <a16:creationId xmlns:a16="http://schemas.microsoft.com/office/drawing/2014/main" id="{3D8D5A29-B5CB-4533-8C74-43479EE26742}"/>
               </a:ext>
             </a:extLst>
           </p:cNvPr>
@@ -12521,7 +12529,7 @@
           <p:cNvPr id="16" name="">
             <a:extLst xmlns:a="http://schemas.openxmlformats.org/drawingml/2006/main">
               <a:ext uri="{FF2B5EF4-FFF2-40B4-BE49-F238E27FC236}">
-                <a16:creationId xmlns:a16="http://schemas.microsoft.com/office/drawing/2014/main" id="{E0CC72BC-9B74-4A95-943A-3281421C80F2}"/>
+                <a16:creationId xmlns:a16="http://schemas.microsoft.com/office/drawing/2014/main" id="{2F483956-E460-487C-ACBE-9D64DFD97336}"/>
               </a:ext>
             </a:extLst>
           </p:cNvPr>
@@ -12578,7 +12586,7 @@
           <p:cNvPr id="17" name="">
             <a:extLst xmlns:a="http://schemas.openxmlformats.org/drawingml/2006/main">
               <a:ext uri="{FF2B5EF4-FFF2-40B4-BE49-F238E27FC236}">
-                <a16:creationId xmlns:a16="http://schemas.microsoft.com/office/drawing/2014/main" id="{EFCE3186-2F9F-4B0E-8BFD-9018E0524521}"/>
+                <a16:creationId xmlns:a16="http://schemas.microsoft.com/office/drawing/2014/main" id="{8E7837A0-0FDB-4B85-93D4-D78951E969BA}"/>
               </a:ext>
             </a:extLst>
           </p:cNvPr>
@@ -12635,7 +12643,7 @@
           <p:cNvPr id="18" name="">
             <a:extLst xmlns:a="http://schemas.openxmlformats.org/drawingml/2006/main">
               <a:ext uri="{FF2B5EF4-FFF2-40B4-BE49-F238E27FC236}">
-                <a16:creationId xmlns:a16="http://schemas.microsoft.com/office/drawing/2014/main" id="{455EF0CE-09A6-4A30-A142-6B90D35FB987}"/>
+                <a16:creationId xmlns:a16="http://schemas.microsoft.com/office/drawing/2014/main" id="{CE15CC06-4C58-4F3D-998E-BF4881EBF29A}"/>
               </a:ext>
             </a:extLst>
           </p:cNvPr>
@@ -12669,7 +12677,7 @@
           <p:cNvPr id="19" name="">
             <a:extLst xmlns:a="http://schemas.openxmlformats.org/drawingml/2006/main">
               <a:ext uri="{FF2B5EF4-FFF2-40B4-BE49-F238E27FC236}">
-                <a16:creationId xmlns:a16="http://schemas.microsoft.com/office/drawing/2014/main" id="{DBC029E4-E5A5-4E7C-9B4F-A85C26131896}"/>
+                <a16:creationId xmlns:a16="http://schemas.microsoft.com/office/drawing/2014/main" id="{E88EA19D-8945-4DAA-B786-7C04B6CBE044}"/>
               </a:ext>
             </a:extLst>
           </p:cNvPr>
@@ -12701,7 +12709,7 @@
           <p:cNvPr id="20" name="">
             <a:extLst xmlns:a="http://schemas.openxmlformats.org/drawingml/2006/main">
               <a:ext uri="{FF2B5EF4-FFF2-40B4-BE49-F238E27FC236}">
-                <a16:creationId xmlns:a16="http://schemas.microsoft.com/office/drawing/2014/main" id="{743FEDCF-4E01-4FB8-B7FF-ED81B7B4E95D}"/>
+                <a16:creationId xmlns:a16="http://schemas.microsoft.com/office/drawing/2014/main" id="{D6056DD2-42A2-4F90-BD29-C5852860B38C}"/>
               </a:ext>
             </a:extLst>
           </p:cNvPr>
@@ -12758,7 +12766,7 @@
           <p:cNvPr id="21" name="">
             <a:extLst xmlns:a="http://schemas.openxmlformats.org/drawingml/2006/main">
               <a:ext uri="{FF2B5EF4-FFF2-40B4-BE49-F238E27FC236}">
-                <a16:creationId xmlns:a16="http://schemas.microsoft.com/office/drawing/2014/main" id="{A7AAEB93-0E4C-499B-AE41-0D08D1CA690C}"/>
+                <a16:creationId xmlns:a16="http://schemas.microsoft.com/office/drawing/2014/main" id="{32A32CC1-7338-4158-BD18-FA22F65DA3A0}"/>
               </a:ext>
             </a:extLst>
           </p:cNvPr>
@@ -12815,7 +12823,7 @@
           <p:cNvPr id="22" name="">
             <a:extLst xmlns:a="http://schemas.openxmlformats.org/drawingml/2006/main">
               <a:ext uri="{FF2B5EF4-FFF2-40B4-BE49-F238E27FC236}">
-                <a16:creationId xmlns:a16="http://schemas.microsoft.com/office/drawing/2014/main" id="{B41DA75E-4099-49C9-BC33-34BFE767B4C2}"/>
+                <a16:creationId xmlns:a16="http://schemas.microsoft.com/office/drawing/2014/main" id="{A6383406-9989-44DF-A243-8720757133D8}"/>
               </a:ext>
             </a:extLst>
           </p:cNvPr>
@@ -12870,7 +12878,7 @@
     </p:spTree>
     <p:extLst>
       <p:ext uri="{BB962C8B-B14F-4D97-AF65-F5344CB8AC3E}">
-        <p14:creationId xmlns:p14="http://schemas.microsoft.com/office/powerpoint/2010/main" val="1966028358"/>
+        <p14:creationId xmlns:p14="http://schemas.microsoft.com/office/powerpoint/2010/main" val="1799110095"/>
       </p:ext>
     </p:extLst>
   </p:cSld>
@@ -13071,7 +13079,7 @@
           <p:cNvPr id="22" name="">
             <a:extLst xmlns:a="http://schemas.openxmlformats.org/drawingml/2006/main">
               <a:ext uri="{FF2B5EF4-FFF2-40B4-BE49-F238E27FC236}">
-                <a16:creationId xmlns:a16="http://schemas.microsoft.com/office/drawing/2014/main" id="{93DE8F94-76BE-4E1F-B373-081788C46F56}"/>
+                <a16:creationId xmlns:a16="http://schemas.microsoft.com/office/drawing/2014/main" id="{0BC5243E-587F-4AB4-8A2B-E55EE3DCA1DF}"/>
               </a:ext>
             </a:extLst>
           </p:cNvPr>
@@ -13103,7 +13111,7 @@
           <p:cNvPr id="2" name="">
             <a:extLst xmlns:a="http://schemas.openxmlformats.org/drawingml/2006/main">
               <a:ext uri="{FF2B5EF4-FFF2-40B4-BE49-F238E27FC236}">
-                <a16:creationId xmlns:a16="http://schemas.microsoft.com/office/drawing/2014/main" id="{99116FF5-0182-4AE0-88A5-F02217E6579B}"/>
+                <a16:creationId xmlns:a16="http://schemas.microsoft.com/office/drawing/2014/main" id="{DC48AB31-5441-44DB-B6BC-E9673D28FA69}"/>
               </a:ext>
             </a:extLst>
           </p:cNvPr>
@@ -13160,7 +13168,7 @@
           <p:cNvPr id="3" name="">
             <a:extLst xmlns:a="http://schemas.openxmlformats.org/drawingml/2006/main">
               <a:ext uri="{FF2B5EF4-FFF2-40B4-BE49-F238E27FC236}">
-                <a16:creationId xmlns:a16="http://schemas.microsoft.com/office/drawing/2014/main" id="{6A7B534D-B04B-461A-96B0-9216FA8CD73F}"/>
+                <a16:creationId xmlns:a16="http://schemas.microsoft.com/office/drawing/2014/main" id="{75A42F70-2AE1-43E9-B3C3-2045C96310BA}"/>
               </a:ext>
             </a:extLst>
           </p:cNvPr>
@@ -13192,7 +13200,7 @@
           <p:cNvPr id="4" name="">
             <a:extLst xmlns:a="http://schemas.openxmlformats.org/drawingml/2006/main">
               <a:ext uri="{FF2B5EF4-FFF2-40B4-BE49-F238E27FC236}">
-                <a16:creationId xmlns:a16="http://schemas.microsoft.com/office/drawing/2014/main" id="{1DCBD48C-0827-47F9-B613-3465E5D05E12}"/>
+                <a16:creationId xmlns:a16="http://schemas.microsoft.com/office/drawing/2014/main" id="{5A7E3364-3C1A-40F2-BA3F-4EBD14E13250}"/>
               </a:ext>
             </a:extLst>
           </p:cNvPr>
@@ -13249,7 +13257,7 @@
           <p:cNvPr id="5" name="">
             <a:extLst xmlns:a="http://schemas.openxmlformats.org/drawingml/2006/main">
               <a:ext uri="{FF2B5EF4-FFF2-40B4-BE49-F238E27FC236}">
-                <a16:creationId xmlns:a16="http://schemas.microsoft.com/office/drawing/2014/main" id="{55ECB377-A53E-4589-8FAF-DD47FB864088}"/>
+                <a16:creationId xmlns:a16="http://schemas.microsoft.com/office/drawing/2014/main" id="{450EFF3D-0F07-440E-8C29-CAF102A9E230}"/>
               </a:ext>
             </a:extLst>
           </p:cNvPr>
@@ -13306,7 +13314,7 @@
           <p:cNvPr id="6" name="">
             <a:extLst xmlns:a="http://schemas.openxmlformats.org/drawingml/2006/main">
               <a:ext uri="{FF2B5EF4-FFF2-40B4-BE49-F238E27FC236}">
-                <a16:creationId xmlns:a16="http://schemas.microsoft.com/office/drawing/2014/main" id="{10E2D7D0-46FB-4E7F-90BE-B12A944626E8}"/>
+                <a16:creationId xmlns:a16="http://schemas.microsoft.com/office/drawing/2014/main" id="{C2D887F0-E670-4D64-B7C8-3DC2FBED4F84}"/>
               </a:ext>
             </a:extLst>
           </p:cNvPr>
@@ -13363,7 +13371,7 @@
           <p:cNvPr id="7" name="">
             <a:extLst xmlns:a="http://schemas.openxmlformats.org/drawingml/2006/main">
               <a:ext uri="{FF2B5EF4-FFF2-40B4-BE49-F238E27FC236}">
-                <a16:creationId xmlns:a16="http://schemas.microsoft.com/office/drawing/2014/main" id="{8DCCDC20-11F6-4D29-80AE-257F06CDF664}"/>
+                <a16:creationId xmlns:a16="http://schemas.microsoft.com/office/drawing/2014/main" id="{4811EB4E-AB1B-4CE2-ADCE-515221C7A43B}"/>
               </a:ext>
             </a:extLst>
           </p:cNvPr>
@@ -13395,7 +13403,7 @@
           <p:cNvPr id="8" name="">
             <a:extLst xmlns:a="http://schemas.openxmlformats.org/drawingml/2006/main">
               <a:ext uri="{FF2B5EF4-FFF2-40B4-BE49-F238E27FC236}">
-                <a16:creationId xmlns:a16="http://schemas.microsoft.com/office/drawing/2014/main" id="{86DD7CA1-2D2A-41B8-B2C3-B5945C555EEA}"/>
+                <a16:creationId xmlns:a16="http://schemas.microsoft.com/office/drawing/2014/main" id="{57365B84-8B4A-40C8-B49D-F9EC9C35BB0F}"/>
               </a:ext>
             </a:extLst>
           </p:cNvPr>
@@ -13452,7 +13460,7 @@
           <p:cNvPr id="9" name="">
             <a:extLst xmlns:a="http://schemas.openxmlformats.org/drawingml/2006/main">
               <a:ext uri="{FF2B5EF4-FFF2-40B4-BE49-F238E27FC236}">
-                <a16:creationId xmlns:a16="http://schemas.microsoft.com/office/drawing/2014/main" id="{37045A44-1402-4C68-9A9A-2230EE90E3BA}"/>
+                <a16:creationId xmlns:a16="http://schemas.microsoft.com/office/drawing/2014/main" id="{CD970C39-21D5-463C-9627-C399EEF5601C}"/>
               </a:ext>
             </a:extLst>
           </p:cNvPr>
@@ -13509,7 +13517,7 @@
           <p:cNvPr id="10" name="">
             <a:extLst xmlns:a="http://schemas.openxmlformats.org/drawingml/2006/main">
               <a:ext uri="{FF2B5EF4-FFF2-40B4-BE49-F238E27FC236}">
-                <a16:creationId xmlns:a16="http://schemas.microsoft.com/office/drawing/2014/main" id="{429F5D9B-E79A-4EDC-AF83-36A9897FB863}"/>
+                <a16:creationId xmlns:a16="http://schemas.microsoft.com/office/drawing/2014/main" id="{8346DB66-67DB-45BA-B9F1-5CD03E8DF385}"/>
               </a:ext>
             </a:extLst>
           </p:cNvPr>
@@ -13543,7 +13551,7 @@
           <p:cNvPr id="11" name="">
             <a:extLst xmlns:a="http://schemas.openxmlformats.org/drawingml/2006/main">
               <a:ext uri="{FF2B5EF4-FFF2-40B4-BE49-F238E27FC236}">
-                <a16:creationId xmlns:a16="http://schemas.microsoft.com/office/drawing/2014/main" id="{0DBDB6E9-0D59-4C69-BE0F-64B1FAB2E35E}"/>
+                <a16:creationId xmlns:a16="http://schemas.microsoft.com/office/drawing/2014/main" id="{4665FCCA-8AAD-461D-B5AA-8789E9C295E4}"/>
               </a:ext>
             </a:extLst>
           </p:cNvPr>
@@ -13575,7 +13583,7 @@
           <p:cNvPr id="12" name="">
             <a:extLst xmlns:a="http://schemas.openxmlformats.org/drawingml/2006/main">
               <a:ext uri="{FF2B5EF4-FFF2-40B4-BE49-F238E27FC236}">
-                <a16:creationId xmlns:a16="http://schemas.microsoft.com/office/drawing/2014/main" id="{F24D346B-7DCA-4DD2-9B26-CFF4F23A2F2C}"/>
+                <a16:creationId xmlns:a16="http://schemas.microsoft.com/office/drawing/2014/main" id="{BF899F83-9D75-430C-AB29-9398894D6B28}"/>
               </a:ext>
             </a:extLst>
           </p:cNvPr>
@@ -13632,7 +13640,7 @@
           <p:cNvPr id="13" name="">
             <a:extLst xmlns:a="http://schemas.openxmlformats.org/drawingml/2006/main">
               <a:ext uri="{FF2B5EF4-FFF2-40B4-BE49-F238E27FC236}">
-                <a16:creationId xmlns:a16="http://schemas.microsoft.com/office/drawing/2014/main" id="{F4CAD01D-F67F-4FED-9325-6829DC8B043D}"/>
+                <a16:creationId xmlns:a16="http://schemas.microsoft.com/office/drawing/2014/main" id="{2A885B49-F18E-4499-AC83-627B4631DF36}"/>
               </a:ext>
             </a:extLst>
           </p:cNvPr>
@@ -13689,7 +13697,7 @@
           <p:cNvPr id="14" name="">
             <a:extLst xmlns:a="http://schemas.openxmlformats.org/drawingml/2006/main">
               <a:ext uri="{FF2B5EF4-FFF2-40B4-BE49-F238E27FC236}">
-                <a16:creationId xmlns:a16="http://schemas.microsoft.com/office/drawing/2014/main" id="{829C6FF0-78D7-4476-AAE1-EEB521D18115}"/>
+                <a16:creationId xmlns:a16="http://schemas.microsoft.com/office/drawing/2014/main" id="{428897F1-9E22-47D8-990A-A7C848288909}"/>
               </a:ext>
             </a:extLst>
           </p:cNvPr>
@@ -13723,7 +13731,7 @@
           <p:cNvPr id="15" name="">
             <a:extLst xmlns:a="http://schemas.openxmlformats.org/drawingml/2006/main">
               <a:ext uri="{FF2B5EF4-FFF2-40B4-BE49-F238E27FC236}">
-                <a16:creationId xmlns:a16="http://schemas.microsoft.com/office/drawing/2014/main" id="{C75A4C24-7038-499C-A9E8-1D383318C842}"/>
+                <a16:creationId xmlns:a16="http://schemas.microsoft.com/office/drawing/2014/main" id="{15DE3EBA-34B2-4A88-9C26-BB582EA7320B}"/>
               </a:ext>
             </a:extLst>
           </p:cNvPr>
@@ -13755,7 +13763,7 @@
           <p:cNvPr id="16" name="">
             <a:extLst xmlns:a="http://schemas.openxmlformats.org/drawingml/2006/main">
               <a:ext uri="{FF2B5EF4-FFF2-40B4-BE49-F238E27FC236}">
-                <a16:creationId xmlns:a16="http://schemas.microsoft.com/office/drawing/2014/main" id="{FAB658FB-0848-4A35-A301-26E40051EB09}"/>
+                <a16:creationId xmlns:a16="http://schemas.microsoft.com/office/drawing/2014/main" id="{E01FF3AB-AA39-4A51-B0EF-4BBF4272A200}"/>
               </a:ext>
             </a:extLst>
           </p:cNvPr>
@@ -13812,7 +13820,7 @@
           <p:cNvPr id="17" name="">
             <a:extLst xmlns:a="http://schemas.openxmlformats.org/drawingml/2006/main">
               <a:ext uri="{FF2B5EF4-FFF2-40B4-BE49-F238E27FC236}">
-                <a16:creationId xmlns:a16="http://schemas.microsoft.com/office/drawing/2014/main" id="{75E34F9D-11A6-4651-9266-F5717192754A}"/>
+                <a16:creationId xmlns:a16="http://schemas.microsoft.com/office/drawing/2014/main" id="{561D6AD6-529F-4C42-AA2E-821645B22D0C}"/>
               </a:ext>
             </a:extLst>
           </p:cNvPr>
@@ -13869,7 +13877,7 @@
           <p:cNvPr id="18" name="">
             <a:extLst xmlns:a="http://schemas.openxmlformats.org/drawingml/2006/main">
               <a:ext uri="{FF2B5EF4-FFF2-40B4-BE49-F238E27FC236}">
-                <a16:creationId xmlns:a16="http://schemas.microsoft.com/office/drawing/2014/main" id="{6172C66D-F32C-4B22-9139-9F7469AFF376}"/>
+                <a16:creationId xmlns:a16="http://schemas.microsoft.com/office/drawing/2014/main" id="{559FE500-834B-4A8C-B550-65CFBC12B406}"/>
               </a:ext>
             </a:extLst>
           </p:cNvPr>
@@ -13903,7 +13911,7 @@
           <p:cNvPr id="19" name="">
             <a:extLst xmlns:a="http://schemas.openxmlformats.org/drawingml/2006/main">
               <a:ext uri="{FF2B5EF4-FFF2-40B4-BE49-F238E27FC236}">
-                <a16:creationId xmlns:a16="http://schemas.microsoft.com/office/drawing/2014/main" id="{B418559E-8422-4AB5-8441-E87F3F42B450}"/>
+                <a16:creationId xmlns:a16="http://schemas.microsoft.com/office/drawing/2014/main" id="{489805D5-B989-4359-A73D-F22F7B8012CD}"/>
               </a:ext>
             </a:extLst>
           </p:cNvPr>
@@ -13935,7 +13943,7 @@
           <p:cNvPr id="20" name="">
             <a:extLst xmlns:a="http://schemas.openxmlformats.org/drawingml/2006/main">
               <a:ext uri="{FF2B5EF4-FFF2-40B4-BE49-F238E27FC236}">
-                <a16:creationId xmlns:a16="http://schemas.microsoft.com/office/drawing/2014/main" id="{471900DF-BA4E-4CC0-BE25-D98C1758EDAE}"/>
+                <a16:creationId xmlns:a16="http://schemas.microsoft.com/office/drawing/2014/main" id="{BE444B22-760D-4E06-A6A3-D4A1D48323C5}"/>
               </a:ext>
             </a:extLst>
           </p:cNvPr>
@@ -13992,7 +14000,7 @@
           <p:cNvPr id="21" name="">
             <a:extLst xmlns:a="http://schemas.openxmlformats.org/drawingml/2006/main">
               <a:ext uri="{FF2B5EF4-FFF2-40B4-BE49-F238E27FC236}">
-                <a16:creationId xmlns:a16="http://schemas.microsoft.com/office/drawing/2014/main" id="{1C121921-30A7-41A1-B4BD-8FE284331D04}"/>
+                <a16:creationId xmlns:a16="http://schemas.microsoft.com/office/drawing/2014/main" id="{E9D687ED-41A6-4BA7-9215-ED1EA887274D}"/>
               </a:ext>
             </a:extLst>
           </p:cNvPr>
@@ -14047,7 +14055,7 @@
     </p:spTree>
     <p:extLst>
       <p:ext uri="{BB962C8B-B14F-4D97-AF65-F5344CB8AC3E}">
-        <p14:creationId xmlns:p14="http://schemas.microsoft.com/office/powerpoint/2010/main" val="726446530"/>
+        <p14:creationId xmlns:p14="http://schemas.microsoft.com/office/powerpoint/2010/main" val="1842287140"/>
       </p:ext>
     </p:extLst>
   </p:cSld>
